--- a/docs/slides/系統方案規劃.pptx
+++ b/docs/slides/系統方案規劃.pptx
@@ -4126,7 +4126,7 @@
                 <a:ea typeface="Microsoft JhengHei" pitchFamily="34" charset="-122"/>
                 <a:cs typeface="Microsoft JhengHei" pitchFamily="34" charset="-120"/>
               </a:rPr>
-              <a:t>智慧建材 × 智慧服務一體成形。預售期即可在接待中心展示語音控制、智慧公設等互動情境，成為銷售亮點。</a:t>
+              <a:t>智慧建材 × 智慧服務一體成形。預售期即在樣品屋實演「語音預約 → 自動派單」與語音控制情境，成為銷售亮點。</a:t>
             </a:r>
             <a:endParaRPr lang="en-US" sz="1100" dirty="0"/>
           </a:p>
@@ -9009,7 +9009,7 @@
                 <a:ea typeface="Microsoft JhengHei" pitchFamily="34" charset="-122"/>
                 <a:cs typeface="Microsoft JhengHei" pitchFamily="34" charset="-120"/>
               </a:rPr>
-              <a:t>接待中心示範組(平板+音箱)</a:t>
+              <a:t>樣品屋示範組:平板+音箱+情境設備</a:t>
             </a:r>
             <a:endParaRPr lang="en-US" sz="1050" dirty="0"/>
           </a:p>
@@ -9093,7 +9093,7 @@
                 <a:ea typeface="Microsoft JhengHei" pitchFamily="34" charset="-122"/>
                 <a:cs typeface="Microsoft JhengHei" pitchFamily="34" charset="-120"/>
               </a:rPr>
-              <a:t>預售期銷售現場即展示</a:t>
+              <a:t>樣品屋實演語音預約→派單</a:t>
             </a:r>
             <a:endParaRPr lang="en-US" sz="950" dirty="0"/>
           </a:p>
@@ -10545,7 +10545,7 @@
                 <a:ea typeface="Microsoft JhengHei" pitchFamily="34" charset="-122"/>
                 <a:cs typeface="Microsoft JhengHei" pitchFamily="34" charset="-120"/>
               </a:rPr>
-              <a:t>以軟體開發為優先 —— 幾乎零硬體投入，開發與行銷同步進行</a:t>
+              <a:t>以軟體開發為優先 —— 樣品屋以最小硬體實演「語音預約 → 自動派單」全流程</a:t>
             </a:r>
             <a:endParaRPr lang="en-US" sz="1250" dirty="0"/>
           </a:p>
@@ -10813,7 +10813,7 @@
                 <a:ea typeface="Microsoft JhengHei" pitchFamily="34" charset="-122"/>
                 <a:cs typeface="Microsoft JhengHei" pitchFamily="34" charset="-120"/>
               </a:rPr>
-              <a:t>本階段投入（開發為主）</a:t>
+              <a:t>本階段投入（開發為主・樣品屋示範）</a:t>
             </a:r>
             <a:endParaRPr lang="en-US" sz="1200" dirty="0"/>
           </a:p>
@@ -10866,7 +10866,7 @@
                 <a:ea typeface="Microsoft JhengHei" pitchFamily="34" charset="-122"/>
                 <a:cs typeface="Microsoft JhengHei" pitchFamily="34" charset="-120"/>
               </a:rPr>
-              <a:t>品牌化客製開發</a:t>
+              <a:t>語音預約・派單實演(樣品屋)</a:t>
             </a:r>
             <a:endParaRPr lang="en-US" sz="1000" dirty="0"/>
           </a:p>
@@ -10881,7 +10881,7 @@
         <p:spPr>
           <a:xfrm>
             <a:off x="932688" y="2295144"/>
-            <a:ext cx="4983480" cy="486461"/>
+            <a:ext cx="4983480" cy="359664"/>
           </a:xfrm>
           <a:prstGeom prst="rect">
             <a:avLst/>
@@ -10908,7 +10908,7 @@
                 <a:ea typeface="Microsoft JhengHei" pitchFamily="34" charset="-122"/>
                 <a:cs typeface="Microsoft JhengHei" pitchFamily="34" charset="-120"/>
               </a:rPr>
-              <a:t>建案名稱/主視覺/公設清單/收費規則 —— 以現有平台為基底客製</a:t>
+              <a:t>對平板說一句話預約公設 → 系統自動建立派工單 —— 全流程功能已上線</a:t>
             </a:r>
             <a:endParaRPr lang="en-US" sz="980" dirty="0"/>
           </a:p>
@@ -10922,7 +10922,7 @@
         </p:nvSpPr>
         <p:spPr>
           <a:xfrm>
-            <a:off x="713232" y="2809037"/>
+            <a:off x="713232" y="2682240"/>
             <a:ext cx="5257800" cy="237744"/>
           </a:xfrm>
           <a:prstGeom prst="rect">
@@ -10941,7 +10941,7 @@
             <a:r>
               <a:rPr lang="en-US" sz="1000" dirty="0">
                 <a:solidFill>
-                  <a:srgbClr val="69D6A8"/>
+                  <a:srgbClr val="C9A35A"/>
                 </a:solidFill>
                 <a:latin typeface="Microsoft JhengHei" pitchFamily="34" charset="0"/>
                 <a:ea typeface="Microsoft JhengHei" pitchFamily="34" charset="-122"/>
@@ -10961,7 +10961,7 @@
                 <a:ea typeface="Microsoft JhengHei" pitchFamily="34" charset="-122"/>
                 <a:cs typeface="Microsoft JhengHei" pitchFamily="34" charset="-120"/>
               </a:rPr>
-              <a:t>功能盤點與客製</a:t>
+              <a:t>樣品屋示範組</a:t>
             </a:r>
             <a:endParaRPr lang="en-US" sz="1000" dirty="0"/>
           </a:p>
@@ -10975,8 +10975,8 @@
         </p:nvSpPr>
         <p:spPr>
           <a:xfrm>
-            <a:off x="932688" y="3055925"/>
-            <a:ext cx="4983480" cy="486461"/>
+            <a:off x="932688" y="2929128"/>
+            <a:ext cx="4983480" cy="359664"/>
           </a:xfrm>
           <a:prstGeom prst="rect">
             <a:avLst/>
@@ -11003,7 +11003,7 @@
                 <a:ea typeface="Microsoft JhengHei" pitchFamily="34" charset="-122"/>
                 <a:cs typeface="Microsoft JhengHei" pitchFamily="34" charset="-120"/>
               </a:rPr>
-              <a:t>依建案定位增修模組(門禁流程/停車規則/公設時段等)</a:t>
+              <a:t>櫃檯平板 ×1(語音預約/派單) + Google Nest 音箱 ×1(語音裝置控制)</a:t>
             </a:r>
             <a:endParaRPr lang="en-US" sz="980" dirty="0"/>
           </a:p>
@@ -11017,7 +11017,7 @@
         </p:nvSpPr>
         <p:spPr>
           <a:xfrm>
-            <a:off x="713232" y="3569818"/>
+            <a:off x="713232" y="3316224"/>
             <a:ext cx="5257800" cy="237744"/>
           </a:xfrm>
           <a:prstGeom prst="rect">
@@ -11036,13 +11036,13 @@
             <a:r>
               <a:rPr lang="en-US" sz="1000" dirty="0">
                 <a:solidFill>
-                  <a:srgbClr val="69D6A8"/>
-                </a:solidFill>
-                <a:latin typeface="Microsoft JhengHei" pitchFamily="34" charset="0"/>
-                <a:ea typeface="Microsoft JhengHei" pitchFamily="34" charset="-122"/>
-                <a:cs typeface="Microsoft JhengHei" pitchFamily="34" charset="-120"/>
-              </a:rPr>
-              <a:t>● </a:t>
+                  <a:srgbClr val="6FB1FF"/>
+                </a:solidFill>
+                <a:latin typeface="Microsoft JhengHei" pitchFamily="34" charset="0"/>
+                <a:ea typeface="Microsoft JhengHei" pitchFamily="34" charset="-122"/>
+                <a:cs typeface="Microsoft JhengHei" pitchFamily="34" charset="-120"/>
+              </a:rPr>
+              <a:t>○ </a:t>
             </a:r>
             <a:pPr indent="0" marL="0">
               <a:buNone/>
@@ -11056,7 +11056,7 @@
                 <a:ea typeface="Microsoft JhengHei" pitchFamily="34" charset="-122"/>
                 <a:cs typeface="Microsoft JhengHei" pitchFamily="34" charset="-120"/>
               </a:rPr>
-              <a:t>雲端環境部署</a:t>
+              <a:t>樣品屋情境設備</a:t>
             </a:r>
             <a:endParaRPr lang="en-US" sz="1000" dirty="0"/>
           </a:p>
@@ -11070,8 +11070,8 @@
         </p:nvSpPr>
         <p:spPr>
           <a:xfrm>
-            <a:off x="932688" y="3816706"/>
-            <a:ext cx="4983480" cy="486461"/>
+            <a:off x="932688" y="3563112"/>
+            <a:ext cx="4983480" cy="359664"/>
           </a:xfrm>
           <a:prstGeom prst="rect">
             <a:avLst/>
@@ -11098,7 +11098,7 @@
                 <a:ea typeface="Microsoft JhengHei" pitchFamily="34" charset="-122"/>
                 <a:cs typeface="Microsoft JhengHei" pitchFamily="34" charset="-120"/>
               </a:rPr>
-              <a:t>Render 後端 + Vercel Web + LINE 官方帳號申請綁定</a:t>
+              <a:t>示範閘道 + 少量燈光/空調/窗簾實裝(或 DRY_RUN 乾跑展示)</a:t>
             </a:r>
             <a:endParaRPr lang="en-US" sz="980" dirty="0"/>
           </a:p>
@@ -11112,7 +11112,7 @@
         </p:nvSpPr>
         <p:spPr>
           <a:xfrm>
-            <a:off x="713232" y="4330598"/>
+            <a:off x="713232" y="3950208"/>
             <a:ext cx="5257800" cy="237744"/>
           </a:xfrm>
           <a:prstGeom prst="rect">
@@ -11131,7 +11131,7 @@
             <a:r>
               <a:rPr lang="en-US" sz="1000" dirty="0">
                 <a:solidFill>
-                  <a:srgbClr val="C9A35A"/>
+                  <a:srgbClr val="69D6A8"/>
                 </a:solidFill>
                 <a:latin typeface="Microsoft JhengHei" pitchFamily="34" charset="0"/>
                 <a:ea typeface="Microsoft JhengHei" pitchFamily="34" charset="-122"/>
@@ -11151,7 +11151,7 @@
                 <a:ea typeface="Microsoft JhengHei" pitchFamily="34" charset="-122"/>
                 <a:cs typeface="Microsoft JhengHei" pitchFamily="34" charset="-120"/>
               </a:rPr>
-              <a:t>接待中心示範組</a:t>
+              <a:t>品牌化客製開發</a:t>
             </a:r>
             <a:endParaRPr lang="en-US" sz="1000" dirty="0"/>
           </a:p>
@@ -11165,8 +11165,8 @@
         </p:nvSpPr>
         <p:spPr>
           <a:xfrm>
-            <a:off x="932688" y="4577486"/>
-            <a:ext cx="4983480" cy="486461"/>
+            <a:off x="932688" y="4197096"/>
+            <a:ext cx="4983480" cy="359664"/>
           </a:xfrm>
           <a:prstGeom prst="rect">
             <a:avLst/>
@@ -11193,7 +11193,7 @@
                 <a:ea typeface="Microsoft JhengHei" pitchFamily="34" charset="-122"/>
                 <a:cs typeface="Microsoft JhengHei" pitchFamily="34" charset="-120"/>
               </a:rPr>
-              <a:t>平板 ×1 + Google Nest 音箱 ×1 —— 本階段唯一硬體</a:t>
+              <a:t>建案名稱/主視覺/公設清單/收費規則 —— 以現有平台為基底客製</a:t>
             </a:r>
             <a:endParaRPr lang="en-US" sz="980" dirty="0"/>
           </a:p>
@@ -11207,7 +11207,7 @@
         </p:nvSpPr>
         <p:spPr>
           <a:xfrm>
-            <a:off x="713232" y="5091379"/>
+            <a:off x="713232" y="4584192"/>
             <a:ext cx="5257800" cy="237744"/>
           </a:xfrm>
           <a:prstGeom prst="rect">
@@ -11226,13 +11226,13 @@
             <a:r>
               <a:rPr lang="en-US" sz="1000" dirty="0">
                 <a:solidFill>
-                  <a:srgbClr val="6FB1FF"/>
-                </a:solidFill>
-                <a:latin typeface="Microsoft JhengHei" pitchFamily="34" charset="0"/>
-                <a:ea typeface="Microsoft JhengHei" pitchFamily="34" charset="-122"/>
-                <a:cs typeface="Microsoft JhengHei" pitchFamily="34" charset="-120"/>
-              </a:rPr>
-              <a:t>○ </a:t>
+                  <a:srgbClr val="69D6A8"/>
+                </a:solidFill>
+                <a:latin typeface="Microsoft JhengHei" pitchFamily="34" charset="0"/>
+                <a:ea typeface="Microsoft JhengHei" pitchFamily="34" charset="-122"/>
+                <a:cs typeface="Microsoft JhengHei" pitchFamily="34" charset="-120"/>
+              </a:rPr>
+              <a:t>● </a:t>
             </a:r>
             <a:pPr indent="0" marL="0">
               <a:buNone/>
@@ -11246,7 +11246,7 @@
                 <a:ea typeface="Microsoft JhengHei" pitchFamily="34" charset="-122"/>
                 <a:cs typeface="Microsoft JhengHei" pitchFamily="34" charset="-120"/>
               </a:rPr>
-              <a:t>示範閘道(乾跑)</a:t>
+              <a:t>雲端環境部署</a:t>
             </a:r>
             <a:endParaRPr lang="en-US" sz="1000" dirty="0"/>
           </a:p>
@@ -11260,8 +11260,8 @@
         </p:nvSpPr>
         <p:spPr>
           <a:xfrm>
-            <a:off x="932688" y="5338267"/>
-            <a:ext cx="4983480" cy="486461"/>
+            <a:off x="932688" y="4831080"/>
+            <a:ext cx="4983480" cy="359664"/>
           </a:xfrm>
           <a:prstGeom prst="rect">
             <a:avLst/>
@@ -11288,7 +11288,7 @@
                 <a:ea typeface="Microsoft JhengHei" pitchFamily="34" charset="-122"/>
                 <a:cs typeface="Microsoft JhengHei" pitchFamily="34" charset="-120"/>
               </a:rPr>
-              <a:t>DRY_RUN 模式或示範機,展示燈光/空調語音互動情境</a:t>
+              <a:t>Render 後端 + Vercel Web + LINE 官方帳號申請綁定</a:t>
             </a:r>
             <a:endParaRPr lang="en-US" sz="980" dirty="0"/>
           </a:p>
@@ -11296,7 +11296,102 @@
       </p:sp>
       <p:sp>
         <p:nvSpPr>
-          <p:cNvPr id="20" name="Shape 18"/>
+          <p:cNvPr id="20" name="Text 18"/>
+          <p:cNvSpPr/>
+          <p:nvPr/>
+        </p:nvSpPr>
+        <p:spPr>
+          <a:xfrm>
+            <a:off x="713232" y="5218176"/>
+            <a:ext cx="5257800" cy="237744"/>
+          </a:xfrm>
+          <a:prstGeom prst="rect">
+            <a:avLst/>
+          </a:prstGeom>
+          <a:noFill/>
+          <a:ln/>
+        </p:spPr>
+        <p:txBody>
+          <a:bodyPr wrap="square" lIns="0" tIns="0" rIns="0" bIns="0" rtlCol="0" anchor="ctr"/>
+          <a:lstStyle/>
+          <a:p>
+            <a:pPr indent="0" marL="0">
+              <a:buNone/>
+            </a:pPr>
+            <a:r>
+              <a:rPr lang="en-US" sz="1000" dirty="0">
+                <a:solidFill>
+                  <a:srgbClr val="69D6A8"/>
+                </a:solidFill>
+                <a:latin typeface="Microsoft JhengHei" pitchFamily="34" charset="0"/>
+                <a:ea typeface="Microsoft JhengHei" pitchFamily="34" charset="-122"/>
+                <a:cs typeface="Microsoft JhengHei" pitchFamily="34" charset="-120"/>
+              </a:rPr>
+              <a:t>● </a:t>
+            </a:r>
+            <a:pPr indent="0" marL="0">
+              <a:buNone/>
+            </a:pPr>
+            <a:r>
+              <a:rPr lang="en-US" sz="1200" b="1" dirty="0">
+                <a:solidFill>
+                  <a:srgbClr val="F6F3EC"/>
+                </a:solidFill>
+                <a:latin typeface="Microsoft JhengHei" pitchFamily="34" charset="0"/>
+                <a:ea typeface="Microsoft JhengHei" pitchFamily="34" charset="-122"/>
+                <a:cs typeface="Microsoft JhengHei" pitchFamily="34" charset="-120"/>
+              </a:rPr>
+              <a:t>功能盤點與客製</a:t>
+            </a:r>
+            <a:endParaRPr lang="en-US" sz="1000" dirty="0"/>
+          </a:p>
+        </p:txBody>
+      </p:sp>
+      <p:sp>
+        <p:nvSpPr>
+          <p:cNvPr id="21" name="Text 19"/>
+          <p:cNvSpPr/>
+          <p:nvPr/>
+        </p:nvSpPr>
+        <p:spPr>
+          <a:xfrm>
+            <a:off x="932688" y="5465064"/>
+            <a:ext cx="4983480" cy="359664"/>
+          </a:xfrm>
+          <a:prstGeom prst="rect">
+            <a:avLst/>
+          </a:prstGeom>
+          <a:noFill/>
+          <a:ln/>
+        </p:spPr>
+        <p:txBody>
+          <a:bodyPr wrap="square" lIns="0" tIns="0" rIns="0" bIns="0" rtlCol="0" anchor="t"/>
+          <a:lstStyle/>
+          <a:p>
+            <a:pPr indent="0" marL="0">
+              <a:lnSpc>
+                <a:spcPct val="100000"/>
+              </a:lnSpc>
+              <a:buNone/>
+            </a:pPr>
+            <a:r>
+              <a:rPr lang="en-US" sz="980" dirty="0">
+                <a:solidFill>
+                  <a:srgbClr val="CDD8EC"/>
+                </a:solidFill>
+                <a:latin typeface="Microsoft JhengHei" pitchFamily="34" charset="0"/>
+                <a:ea typeface="Microsoft JhengHei" pitchFamily="34" charset="-122"/>
+                <a:cs typeface="Microsoft JhengHei" pitchFamily="34" charset="-120"/>
+              </a:rPr>
+              <a:t>依建案定位增修模組(門禁流程/停車規則/公設時段等)</a:t>
+            </a:r>
+            <a:endParaRPr lang="en-US" sz="980" dirty="0"/>
+          </a:p>
+        </p:txBody>
+      </p:sp>
+      <p:sp>
+        <p:nvSpPr>
+          <p:cNvPr id="22" name="Shape 20"/>
           <p:cNvSpPr/>
           <p:nvPr/>
         </p:nvSpPr>
@@ -11334,7 +11429,7 @@
       </p:sp>
       <p:sp>
         <p:nvSpPr>
-          <p:cNvPr id="21" name="Text 19"/>
+          <p:cNvPr id="23" name="Text 21"/>
           <p:cNvSpPr/>
           <p:nvPr/>
         </p:nvSpPr>
@@ -11373,7 +11468,7 @@
       </p:sp>
       <p:sp>
         <p:nvSpPr>
-          <p:cNvPr id="22" name="Text 20"/>
+          <p:cNvPr id="24" name="Text 22"/>
           <p:cNvSpPr/>
           <p:nvPr/>
         </p:nvSpPr>
@@ -11411,7 +11506,7 @@
                 <a:ea typeface="Microsoft JhengHei" pitchFamily="34" charset="-122"/>
                 <a:cs typeface="Microsoft JhengHei" pitchFamily="34" charset="-120"/>
               </a:rPr>
-              <a:t>預售期銷售現場互動展示：語音控制、智慧公設情境</a:t>
+              <a:t>樣品屋實演：「一句話預約公設 → 自動派單」完整流程</a:t>
             </a:r>
             <a:endParaRPr lang="en-US" sz="1150" dirty="0"/>
           </a:p>
@@ -11435,7 +11530,7 @@
                 <a:ea typeface="Microsoft JhengHei" pitchFamily="34" charset="-122"/>
                 <a:cs typeface="Microsoft JhengHei" pitchFamily="34" charset="-120"/>
               </a:rPr>
-              <a:t>建案官方 LINE 提前開通,經營潛在住戶客群</a:t>
+              <a:t>語音開關燈光・空調(Nest 裝置控制),智慧情境眼見為憑</a:t>
             </a:r>
             <a:endParaRPr lang="en-US" sz="1150" dirty="0"/>
           </a:p>
@@ -11459,7 +11554,7 @@
                 <a:ea typeface="Microsoft JhengHei" pitchFamily="34" charset="-122"/>
                 <a:cs typeface="Microsoft JhengHei" pitchFamily="34" charset="-120"/>
               </a:rPr>
-              <a:t>住戶名冊・戶別・帳務規則預建,交屋流程提前數位化</a:t>
+              <a:t>預售期銷售現場互動展示,成交前先體驗入住後生活</a:t>
             </a:r>
             <a:endParaRPr lang="en-US" sz="1150" dirty="0"/>
           </a:p>
@@ -11483,7 +11578,7 @@
                 <a:ea typeface="Microsoft JhengHei" pitchFamily="34" charset="-122"/>
                 <a:cs typeface="Microsoft JhengHei" pitchFamily="34" charset="-120"/>
               </a:rPr>
-              <a:t>管理後台先行試營運,物業團隊提早熟悉系統</a:t>
+              <a:t>建案官方 LINE 提前開通,經營潛在住戶客群</a:t>
             </a:r>
             <a:endParaRPr lang="en-US" sz="1150" dirty="0"/>
           </a:p>
@@ -11507,15 +11602,39 @@
                 <a:ea typeface="Microsoft JhengHei" pitchFamily="34" charset="-122"/>
                 <a:cs typeface="Microsoft JhengHei" pitchFamily="34" charset="-120"/>
               </a:rPr>
-              <a:t>零重硬體投入 —— 開發、行銷、預售同步推進</a:t>
+              <a:t>住戶名冊・帳務規則預建 + 管理後台先行試營運</a:t>
             </a:r>
             <a:endParaRPr lang="en-US" sz="1150" dirty="0"/>
           </a:p>
-        </p:txBody>
-      </p:sp>
-      <p:sp>
-        <p:nvSpPr>
-          <p:cNvPr id="23" name="Text 21"/>
+          <a:p>
+            <a:pPr marL="177800" indent="-177800">
+              <a:lnSpc>
+                <a:spcPct val="112000"/>
+              </a:lnSpc>
+              <a:spcAft>
+                <a:spcPts val="1000"/>
+              </a:spcAft>
+              <a:buSzPct val="100000"/>
+              <a:buChar char="•"/>
+            </a:pPr>
+            <a:r>
+              <a:rPr lang="en-US" sz="1150" dirty="0">
+                <a:solidFill>
+                  <a:srgbClr val="CDD8EC"/>
+                </a:solidFill>
+                <a:latin typeface="Microsoft JhengHei" pitchFamily="34" charset="0"/>
+                <a:ea typeface="Microsoft JhengHei" pitchFamily="34" charset="-122"/>
+                <a:cs typeface="Microsoft JhengHei" pitchFamily="34" charset="-120"/>
+              </a:rPr>
+              <a:t>最小硬體投入 —— 開發、行銷、預售同步推進</a:t>
+            </a:r>
+            <a:endParaRPr lang="en-US" sz="1150" dirty="0"/>
+          </a:p>
+        </p:txBody>
+      </p:sp>
+      <p:sp>
+        <p:nvSpPr>
+          <p:cNvPr id="25" name="Text 23"/>
           <p:cNvSpPr/>
           <p:nvPr/>
         </p:nvSpPr>
@@ -11546,7 +11665,7 @@
                 <a:ea typeface="Microsoft JhengHei" pitchFamily="34" charset="-122"/>
                 <a:cs typeface="Microsoft JhengHei" pitchFamily="34" charset="-120"/>
               </a:rPr>
-              <a:t>※ 本階段以軟體開發為優先；完成後即具備 Phase 1 起分批導入硬體的完整雲端基礎。</a:t>
+              <a:t>※ 語音預約/派單由平板・App 麥克風管道提供(已上線);Google 音箱僅裝置控制 —— 樣品屋兩者並列展示、分工明確。</a:t>
             </a:r>
             <a:endParaRPr lang="en-US" sz="1000" dirty="0"/>
           </a:p>
@@ -11554,7 +11673,7 @@
       </p:sp>
       <p:sp>
         <p:nvSpPr>
-          <p:cNvPr id="24" name="Text 22"/>
+          <p:cNvPr id="26" name="Text 24"/>
           <p:cNvSpPr/>
           <p:nvPr/>
         </p:nvSpPr>
@@ -11593,7 +11712,7 @@
       </p:sp>
       <p:sp>
         <p:nvSpPr>
-          <p:cNvPr id="25" name="Text 23"/>
+          <p:cNvPr id="27" name="Text 25"/>
           <p:cNvSpPr/>
           <p:nvPr/>
         </p:nvSpPr>

--- a/docs/slides/系統方案規劃.pptx
+++ b/docs/slides/系統方案規劃.pptx
@@ -15,9 +15,11 @@
     <p:sldId id="263" r:id="rId9"/>
     <p:sldId id="264" r:id="rId10"/>
     <p:sldId id="265" r:id="rId11"/>
+    <p:sldId id="266" r:id="rId12"/>
+    <p:sldId id="267" r:id="rId13"/>
   </p:sldIdLst>
   <p:notesMasterIdLst>
-    <p:notesMasterId r:id="rId12"/>
+    <p:notesMasterId r:id="rId14"/>
   </p:notesMasterIdLst>
   <p:sldSz cx="12191695" cy="6858000"/>
   <p:notesSz cx="6858000" cy="12191695"/>
@@ -623,6 +625,182 @@
             <a:fld id="{F7021451-1387-4CA6-816F-3879F97B5CBC}" type="slidenum">
               <a:rPr lang="en-US"/>
               <a:t>10</a:t>
+            </a:fld>
+            <a:endParaRPr lang="en-US"/>
+          </a:p>
+        </p:txBody>
+      </p:sp>
+    </p:spTree>
+    <p:extLst>
+      <p:ext uri="{BB962C8B-B14F-4D97-AF65-F5344CB8AC3E}">
+        <p14:creationId xmlns:p14="http://schemas.microsoft.com/office/powerpoint/2010/main" val="1024086991"/>
+      </p:ext>
+    </p:extLst>
+  </p:cSld>
+  <p:clrMapOvr>
+    <a:masterClrMapping/>
+  </p:clrMapOvr>
+</p:notes>
+</file>
+
+<file path=ppt/notesSlides/notesSlide11.xml><?xml version="1.0" encoding="utf-8"?>
+<p:notes xmlns:a="http://schemas.openxmlformats.org/drawingml/2006/main" xmlns:r="http://schemas.openxmlformats.org/officeDocument/2006/relationships" xmlns:p="http://schemas.openxmlformats.org/presentationml/2006/main">
+  <p:cSld>
+    <p:spTree>
+      <p:nvGrpSpPr>
+        <p:cNvPr id="1" name=""/>
+        <p:cNvGrpSpPr/>
+        <p:nvPr/>
+      </p:nvGrpSpPr>
+      <p:grpSpPr>
+        <a:xfrm>
+          <a:off x="0" y="0"/>
+          <a:ext cx="0" cy="0"/>
+          <a:chOff x="0" y="0"/>
+          <a:chExt cx="0" cy="0"/>
+        </a:xfrm>
+      </p:grpSpPr>
+      <p:sp>
+        <p:nvSpPr>
+          <p:cNvPr id="2" name="Slide Image Placeholder 1"/>
+          <p:cNvSpPr>
+            <a:spLocks noGrp="1" noRot="1" noChangeAspect="1"/>
+          </p:cNvSpPr>
+          <p:nvPr>
+            <p:ph type="sldImg"/>
+          </p:nvPr>
+        </p:nvSpPr>
+        <p:spPr/>
+      </p:sp>
+      <p:sp>
+        <p:nvSpPr>
+          <p:cNvPr id="3" name="Notes Placeholder 2"/>
+          <p:cNvSpPr>
+            <a:spLocks noGrp="1"/>
+          </p:cNvSpPr>
+          <p:nvPr>
+            <p:ph type="body" idx="1"/>
+          </p:nvPr>
+        </p:nvSpPr>
+        <p:spPr/>
+        <p:txBody>
+          <a:bodyPr/>
+          <a:lstStyle/>
+          <a:p>
+            <a:r>
+              <a:rPr lang="en-US" dirty="0"/>
+              <a:t/>
+            </a:r>
+            <a:endParaRPr lang="en-US" dirty="0"/>
+          </a:p>
+        </p:txBody>
+      </p:sp>
+      <p:sp>
+        <p:nvSpPr>
+          <p:cNvPr id="4" name="Slide Number Placeholder 3"/>
+          <p:cNvSpPr>
+            <a:spLocks noGrp="1"/>
+          </p:cNvSpPr>
+          <p:nvPr>
+            <p:ph type="sldNum" sz="quarter" idx="10"/>
+          </p:nvPr>
+        </p:nvSpPr>
+        <p:spPr/>
+        <p:txBody>
+          <a:bodyPr/>
+          <a:lstStyle/>
+          <a:p>
+            <a:fld id="{F7021451-1387-4CA6-816F-3879F97B5CBC}" type="slidenum">
+              <a:rPr lang="en-US"/>
+              <a:t>11</a:t>
+            </a:fld>
+            <a:endParaRPr lang="en-US"/>
+          </a:p>
+        </p:txBody>
+      </p:sp>
+    </p:spTree>
+    <p:extLst>
+      <p:ext uri="{BB962C8B-B14F-4D97-AF65-F5344CB8AC3E}">
+        <p14:creationId xmlns:p14="http://schemas.microsoft.com/office/powerpoint/2010/main" val="1024086991"/>
+      </p:ext>
+    </p:extLst>
+  </p:cSld>
+  <p:clrMapOvr>
+    <a:masterClrMapping/>
+  </p:clrMapOvr>
+</p:notes>
+</file>
+
+<file path=ppt/notesSlides/notesSlide12.xml><?xml version="1.0" encoding="utf-8"?>
+<p:notes xmlns:a="http://schemas.openxmlformats.org/drawingml/2006/main" xmlns:r="http://schemas.openxmlformats.org/officeDocument/2006/relationships" xmlns:p="http://schemas.openxmlformats.org/presentationml/2006/main">
+  <p:cSld>
+    <p:spTree>
+      <p:nvGrpSpPr>
+        <p:cNvPr id="1" name=""/>
+        <p:cNvGrpSpPr/>
+        <p:nvPr/>
+      </p:nvGrpSpPr>
+      <p:grpSpPr>
+        <a:xfrm>
+          <a:off x="0" y="0"/>
+          <a:ext cx="0" cy="0"/>
+          <a:chOff x="0" y="0"/>
+          <a:chExt cx="0" cy="0"/>
+        </a:xfrm>
+      </p:grpSpPr>
+      <p:sp>
+        <p:nvSpPr>
+          <p:cNvPr id="2" name="Slide Image Placeholder 1"/>
+          <p:cNvSpPr>
+            <a:spLocks noGrp="1" noRot="1" noChangeAspect="1"/>
+          </p:cNvSpPr>
+          <p:nvPr>
+            <p:ph type="sldImg"/>
+          </p:nvPr>
+        </p:nvSpPr>
+        <p:spPr/>
+      </p:sp>
+      <p:sp>
+        <p:nvSpPr>
+          <p:cNvPr id="3" name="Notes Placeholder 2"/>
+          <p:cNvSpPr>
+            <a:spLocks noGrp="1"/>
+          </p:cNvSpPr>
+          <p:nvPr>
+            <p:ph type="body" idx="1"/>
+          </p:nvPr>
+        </p:nvSpPr>
+        <p:spPr/>
+        <p:txBody>
+          <a:bodyPr/>
+          <a:lstStyle/>
+          <a:p>
+            <a:r>
+              <a:rPr lang="en-US" dirty="0"/>
+              <a:t/>
+            </a:r>
+            <a:endParaRPr lang="en-US" dirty="0"/>
+          </a:p>
+        </p:txBody>
+      </p:sp>
+      <p:sp>
+        <p:nvSpPr>
+          <p:cNvPr id="4" name="Slide Number Placeholder 3"/>
+          <p:cNvSpPr>
+            <a:spLocks noGrp="1"/>
+          </p:cNvSpPr>
+          <p:nvPr>
+            <p:ph type="sldNum" sz="quarter" idx="10"/>
+          </p:nvPr>
+        </p:nvSpPr>
+        <p:spPr/>
+        <p:txBody>
+          <a:bodyPr/>
+          <a:lstStyle/>
+          <a:p>
+            <a:fld id="{F7021451-1387-4CA6-816F-3879F97B5CBC}" type="slidenum">
+              <a:rPr lang="en-US"/>
+              <a:t>12</a:t>
             </a:fld>
             <a:endParaRPr lang="en-US"/>
           </a:p>
@@ -1991,6 +2169,3015 @@
                   <a:srgbClr val="C9A35A"/>
                 </a:solidFill>
               </a:rPr>
+              <a:t>SECURITY &amp; OPERATIONS</a:t>
+            </a:r>
+            <a:endParaRPr lang="en-US" sz="1100" dirty="0"/>
+          </a:p>
+        </p:txBody>
+      </p:sp>
+      <p:sp>
+        <p:nvSpPr>
+          <p:cNvPr id="3" name="Text 1"/>
+          <p:cNvSpPr/>
+          <p:nvPr/>
+        </p:nvSpPr>
+        <p:spPr>
+          <a:xfrm>
+            <a:off x="530352" y="530352"/>
+            <a:ext cx="8595360" cy="566928"/>
+          </a:xfrm>
+          <a:prstGeom prst="rect">
+            <a:avLst/>
+          </a:prstGeom>
+          <a:noFill/>
+          <a:ln/>
+        </p:spPr>
+        <p:txBody>
+          <a:bodyPr wrap="square" lIns="0" tIns="0" rIns="0" bIns="0" rtlCol="0" anchor="ctr"/>
+          <a:lstStyle/>
+          <a:p>
+            <a:pPr indent="0" marL="0">
+              <a:buNone/>
+            </a:pPr>
+            <a:r>
+              <a:rPr lang="en-US" sz="2600" b="1" dirty="0">
+                <a:solidFill>
+                  <a:srgbClr val="F6F3EC"/>
+                </a:solidFill>
+                <a:latin typeface="Microsoft JhengHei" pitchFamily="34" charset="0"/>
+                <a:ea typeface="Microsoft JhengHei" pitchFamily="34" charset="-122"/>
+                <a:cs typeface="Microsoft JhengHei" pitchFamily="34" charset="-120"/>
+              </a:rPr>
+              <a:t>資安與維運保障</a:t>
+            </a:r>
+            <a:endParaRPr lang="en-US" sz="2600" dirty="0"/>
+          </a:p>
+        </p:txBody>
+      </p:sp>
+      <p:sp>
+        <p:nvSpPr>
+          <p:cNvPr id="4" name="Text 2"/>
+          <p:cNvSpPr/>
+          <p:nvPr/>
+        </p:nvSpPr>
+        <p:spPr>
+          <a:xfrm>
+            <a:off x="548640" y="1133856"/>
+            <a:ext cx="8778240" cy="329184"/>
+          </a:xfrm>
+          <a:prstGeom prst="rect">
+            <a:avLst/>
+          </a:prstGeom>
+          <a:noFill/>
+          <a:ln/>
+        </p:spPr>
+        <p:txBody>
+          <a:bodyPr wrap="square" lIns="0" tIns="0" rIns="0" bIns="0" rtlCol="0" anchor="ctr"/>
+          <a:lstStyle/>
+          <a:p>
+            <a:pPr indent="0" marL="0">
+              <a:buNone/>
+            </a:pPr>
+            <a:r>
+              <a:rPr lang="en-US" sz="1250" dirty="0">
+                <a:solidFill>
+                  <a:srgbClr val="9FB0CC"/>
+                </a:solidFill>
+                <a:latin typeface="Microsoft JhengHei" pitchFamily="34" charset="0"/>
+                <a:ea typeface="Microsoft JhengHei" pitchFamily="34" charset="-122"/>
+                <a:cs typeface="Microsoft JhengHei" pitchFamily="34" charset="-120"/>
+              </a:rPr>
+              <a:t>資訊安全與長期維運是平台的一部分,不是附加選項</a:t>
+            </a:r>
+            <a:endParaRPr lang="en-US" sz="1250" dirty="0"/>
+          </a:p>
+        </p:txBody>
+      </p:sp>
+      <p:sp>
+        <p:nvSpPr>
+          <p:cNvPr id="5" name="Text 3"/>
+          <p:cNvSpPr/>
+          <p:nvPr/>
+        </p:nvSpPr>
+        <p:spPr>
+          <a:xfrm>
+            <a:off x="8595360" y="457200"/>
+            <a:ext cx="3044952" cy="822960"/>
+          </a:xfrm>
+          <a:prstGeom prst="rect">
+            <a:avLst/>
+          </a:prstGeom>
+          <a:noFill/>
+          <a:ln/>
+        </p:spPr>
+        <p:txBody>
+          <a:bodyPr wrap="square" lIns="0" tIns="0" rIns="0" bIns="0" rtlCol="0" anchor="ctr"/>
+          <a:lstStyle/>
+          <a:p>
+            <a:pPr algn="r" indent="0" marL="0">
+              <a:lnSpc>
+                <a:spcPct val="125000"/>
+              </a:lnSpc>
+              <a:buNone/>
+            </a:pPr>
+            <a:r>
+              <a:rPr lang="en-US" sz="1150" dirty="0">
+                <a:solidFill>
+                  <a:srgbClr val="9FB0CC"/>
+                </a:solidFill>
+                <a:latin typeface="Microsoft JhengHei" pitchFamily="34" charset="0"/>
+                <a:ea typeface="Microsoft JhengHei" pitchFamily="34" charset="-122"/>
+                <a:cs typeface="Microsoft JhengHei" pitchFamily="34" charset="-120"/>
+              </a:rPr>
+              <a:t>全面資安稽核
+</a:t>
+            </a:r>
+            <a:pPr algn="r" indent="0" marL="0">
+              <a:lnSpc>
+                <a:spcPct val="125000"/>
+              </a:lnSpc>
+              <a:buNone/>
+            </a:pPr>
+            <a:r>
+              <a:rPr lang="en-US" sz="1200" b="1" dirty="0">
+                <a:solidFill>
+                  <a:srgbClr val="69D6A8"/>
+                </a:solidFill>
+                <a:latin typeface="Microsoft JhengHei" pitchFamily="34" charset="0"/>
+                <a:ea typeface="Microsoft JhengHei" pitchFamily="34" charset="-122"/>
+                <a:cs typeface="Microsoft JhengHei" pitchFamily="34" charset="-120"/>
+              </a:rPr>
+              <a:t>已完成・全數修復</a:t>
+            </a:r>
+            <a:endParaRPr lang="en-US" sz="1150" dirty="0"/>
+          </a:p>
+        </p:txBody>
+      </p:sp>
+      <p:sp>
+        <p:nvSpPr>
+          <p:cNvPr id="6" name="Text 4"/>
+          <p:cNvSpPr/>
+          <p:nvPr/>
+        </p:nvSpPr>
+        <p:spPr>
+          <a:xfrm>
+            <a:off x="5486400" y="1170432"/>
+            <a:ext cx="6153912" cy="274320"/>
+          </a:xfrm>
+          <a:prstGeom prst="rect">
+            <a:avLst/>
+          </a:prstGeom>
+          <a:noFill/>
+          <a:ln/>
+        </p:spPr>
+        <p:txBody>
+          <a:bodyPr wrap="square" lIns="0" tIns="0" rIns="0" bIns="0" rtlCol="0" anchor="ctr"/>
+          <a:lstStyle/>
+          <a:p>
+            <a:pPr algn="r" indent="0" marL="0">
+              <a:buNone/>
+            </a:pPr>
+            <a:r>
+              <a:rPr lang="en-US" sz="1050" dirty="0">
+                <a:solidFill>
+                  <a:srgbClr val="69D6A8"/>
+                </a:solidFill>
+                <a:latin typeface="Microsoft JhengHei" pitchFamily="34" charset="0"/>
+                <a:ea typeface="Microsoft JhengHei" pitchFamily="34" charset="-122"/>
+                <a:cs typeface="Microsoft JhengHei" pitchFamily="34" charset="-120"/>
+              </a:rPr>
+              <a:t>● </a:t>
+            </a:r>
+            <a:pPr algn="r" indent="0" marL="0">
+              <a:buNone/>
+            </a:pPr>
+            <a:r>
+              <a:rPr lang="en-US" sz="1050" dirty="0">
+                <a:solidFill>
+                  <a:srgbClr val="CDD8EC"/>
+                </a:solidFill>
+                <a:latin typeface="Microsoft JhengHei" pitchFamily="34" charset="0"/>
+                <a:ea typeface="Microsoft JhengHei" pitchFamily="34" charset="-122"/>
+                <a:cs typeface="Microsoft JhengHei" pitchFamily="34" charset="-120"/>
+              </a:rPr>
+              <a:t>已整合上線　</a:t>
+            </a:r>
+            <a:pPr algn="r" indent="0" marL="0">
+              <a:buNone/>
+            </a:pPr>
+            <a:r>
+              <a:rPr lang="en-US" sz="1050" dirty="0">
+                <a:solidFill>
+                  <a:srgbClr val="C9A35A"/>
+                </a:solidFill>
+                <a:latin typeface="Microsoft JhengHei" pitchFamily="34" charset="0"/>
+                <a:ea typeface="Microsoft JhengHei" pitchFamily="34" charset="-122"/>
+                <a:cs typeface="Microsoft JhengHei" pitchFamily="34" charset="-120"/>
+              </a:rPr>
+              <a:t>● </a:t>
+            </a:r>
+            <a:pPr algn="r" indent="0" marL="0">
+              <a:buNone/>
+            </a:pPr>
+            <a:r>
+              <a:rPr lang="en-US" sz="1050" dirty="0">
+                <a:solidFill>
+                  <a:srgbClr val="CDD8EC"/>
+                </a:solidFill>
+                <a:latin typeface="Microsoft JhengHei" pitchFamily="34" charset="0"/>
+                <a:ea typeface="Microsoft JhengHei" pitchFamily="34" charset="-122"/>
+                <a:cs typeface="Microsoft JhengHei" pitchFamily="34" charset="-120"/>
+              </a:rPr>
+              <a:t>建議必備　</a:t>
+            </a:r>
+            <a:pPr algn="r" indent="0" marL="0">
+              <a:buNone/>
+            </a:pPr>
+            <a:r>
+              <a:rPr lang="en-US" sz="1050" dirty="0">
+                <a:solidFill>
+                  <a:srgbClr val="6FB1FF"/>
+                </a:solidFill>
+                <a:latin typeface="Microsoft JhengHei" pitchFamily="34" charset="0"/>
+                <a:ea typeface="Microsoft JhengHei" pitchFamily="34" charset="-122"/>
+                <a:cs typeface="Microsoft JhengHei" pitchFamily="34" charset="-120"/>
+              </a:rPr>
+              <a:t>○ </a:t>
+            </a:r>
+            <a:pPr algn="r" indent="0" marL="0">
+              <a:buNone/>
+            </a:pPr>
+            <a:r>
+              <a:rPr lang="en-US" sz="1050" dirty="0">
+                <a:solidFill>
+                  <a:srgbClr val="CDD8EC"/>
+                </a:solidFill>
+                <a:latin typeface="Microsoft JhengHei" pitchFamily="34" charset="0"/>
+                <a:ea typeface="Microsoft JhengHei" pitchFamily="34" charset="-122"/>
+                <a:cs typeface="Microsoft JhengHei" pitchFamily="34" charset="-120"/>
+              </a:rPr>
+              <a:t>選配・待接</a:t>
+            </a:r>
+            <a:endParaRPr lang="en-US" sz="1050" dirty="0"/>
+          </a:p>
+        </p:txBody>
+      </p:sp>
+      <p:sp>
+        <p:nvSpPr>
+          <p:cNvPr id="7" name="Shape 5"/>
+          <p:cNvSpPr/>
+          <p:nvPr/>
+        </p:nvSpPr>
+        <p:spPr>
+          <a:xfrm>
+            <a:off x="457200" y="1572768"/>
+            <a:ext cx="5550408" cy="4370832"/>
+          </a:xfrm>
+          <a:prstGeom prst="roundRect">
+            <a:avLst>
+              <a:gd name="adj" fmla="val 2301"/>
+            </a:avLst>
+          </a:prstGeom>
+          <a:solidFill>
+            <a:srgbClr val="12203A">
+              <a:alpha val="80000"/>
+            </a:srgbClr>
+          </a:solidFill>
+          <a:ln w="9525">
+            <a:solidFill>
+              <a:srgbClr val="C9A35A">
+                <a:alpha val="42000"/>
+              </a:srgbClr>
+            </a:solidFill>
+            <a:prstDash val="solid"/>
+          </a:ln>
+          <a:effectLst>
+            <a:outerShdw sx="100000" sy="100000" kx="0" ky="0" algn="bl" rotWithShape="0" blurRad="101600" dist="38100" dir="5400000">
+              <a:srgbClr val="000000">
+                <a:alpha val="30000"/>
+              </a:srgbClr>
+            </a:outerShdw>
+          </a:effectLst>
+        </p:spPr>
+      </p:sp>
+      <p:sp>
+        <p:nvSpPr>
+          <p:cNvPr id="8" name="Shape 6"/>
+          <p:cNvSpPr/>
+          <p:nvPr/>
+        </p:nvSpPr>
+        <p:spPr>
+          <a:xfrm>
+            <a:off x="676656" y="1719072"/>
+            <a:ext cx="457200" cy="457200"/>
+          </a:xfrm>
+          <a:prstGeom prst="ellipse">
+            <a:avLst/>
+          </a:prstGeom>
+          <a:solidFill>
+            <a:srgbClr val="0F1C33"/>
+          </a:solidFill>
+          <a:ln w="10160">
+            <a:solidFill>
+              <a:srgbClr val="C9A35A">
+                <a:alpha val="65000"/>
+              </a:srgbClr>
+            </a:solidFill>
+            <a:prstDash val="solid"/>
+          </a:ln>
+        </p:spPr>
+      </p:sp>
+      <p:pic>
+        <p:nvPicPr>
+          <p:cNvPr id="9" name="Image 0" descr="preencoded.png">    </p:cNvPr>
+          <p:cNvPicPr>
+            <a:picLocks noChangeAspect="1"/>
+          </p:cNvPicPr>
+          <p:nvPr/>
+        </p:nvPicPr>
+        <p:blipFill>
+          <a:blip r:embed="rId2"/>
+          <a:stretch>
+            <a:fillRect/>
+          </a:stretch>
+        </p:blipFill>
+        <p:spPr>
+          <a:xfrm>
+            <a:off x="790956" y="1833372"/>
+            <a:ext cx="228600" cy="228600"/>
+          </a:xfrm>
+          <a:prstGeom prst="rect">
+            <a:avLst/>
+          </a:prstGeom>
+        </p:spPr>
+      </p:pic>
+      <p:sp>
+        <p:nvSpPr>
+          <p:cNvPr id="10" name="Text 7"/>
+          <p:cNvSpPr/>
+          <p:nvPr/>
+        </p:nvSpPr>
+        <p:spPr>
+          <a:xfrm>
+            <a:off x="1261872" y="1719072"/>
+            <a:ext cx="4544568" cy="457200"/>
+          </a:xfrm>
+          <a:prstGeom prst="rect">
+            <a:avLst/>
+          </a:prstGeom>
+          <a:noFill/>
+          <a:ln/>
+        </p:spPr>
+        <p:txBody>
+          <a:bodyPr wrap="square" lIns="0" tIns="0" rIns="0" bIns="0" rtlCol="0" anchor="ctr"/>
+          <a:lstStyle/>
+          <a:p>
+            <a:pPr indent="0" marL="0">
+              <a:buNone/>
+            </a:pPr>
+            <a:r>
+              <a:rPr lang="en-US" sz="1500" b="1" dirty="0">
+                <a:solidFill>
+                  <a:srgbClr val="F6F3EC"/>
+                </a:solidFill>
+                <a:latin typeface="Microsoft JhengHei" pitchFamily="34" charset="0"/>
+                <a:ea typeface="Microsoft JhengHei" pitchFamily="34" charset="-122"/>
+                <a:cs typeface="Microsoft JhengHei" pitchFamily="34" charset="-120"/>
+              </a:rPr>
+              <a:t>資訊安全</a:t>
+            </a:r>
+            <a:endParaRPr lang="en-US" sz="1500" dirty="0"/>
+          </a:p>
+        </p:txBody>
+      </p:sp>
+      <p:sp>
+        <p:nvSpPr>
+          <p:cNvPr id="11" name="Shape 8"/>
+          <p:cNvSpPr/>
+          <p:nvPr/>
+        </p:nvSpPr>
+        <p:spPr>
+          <a:xfrm>
+            <a:off x="676656" y="2322576"/>
+            <a:ext cx="5111496" cy="0"/>
+          </a:xfrm>
+          <a:prstGeom prst="line">
+            <a:avLst/>
+          </a:prstGeom>
+          <a:noFill/>
+          <a:ln w="6350">
+            <a:solidFill>
+              <a:srgbClr val="C9A35A">
+                <a:alpha val="45000"/>
+              </a:srgbClr>
+            </a:solidFill>
+            <a:prstDash val="dash"/>
+          </a:ln>
+        </p:spPr>
+      </p:sp>
+      <p:sp>
+        <p:nvSpPr>
+          <p:cNvPr id="12" name="Text 9"/>
+          <p:cNvSpPr/>
+          <p:nvPr/>
+        </p:nvSpPr>
+        <p:spPr>
+          <a:xfrm>
+            <a:off x="694944" y="2414016"/>
+            <a:ext cx="5093208" cy="237744"/>
+          </a:xfrm>
+          <a:prstGeom prst="rect">
+            <a:avLst/>
+          </a:prstGeom>
+          <a:noFill/>
+          <a:ln/>
+        </p:spPr>
+        <p:txBody>
+          <a:bodyPr wrap="square" lIns="0" tIns="0" rIns="0" bIns="0" rtlCol="0" anchor="ctr"/>
+          <a:lstStyle/>
+          <a:p>
+            <a:pPr indent="0" marL="0">
+              <a:buNone/>
+            </a:pPr>
+            <a:r>
+              <a:rPr lang="en-US" sz="1000" dirty="0">
+                <a:solidFill>
+                  <a:srgbClr val="69D6A8"/>
+                </a:solidFill>
+                <a:latin typeface="Microsoft JhengHei" pitchFamily="34" charset="0"/>
+                <a:ea typeface="Microsoft JhengHei" pitchFamily="34" charset="-122"/>
+                <a:cs typeface="Microsoft JhengHei" pitchFamily="34" charset="-120"/>
+              </a:rPr>
+              <a:t>● </a:t>
+            </a:r>
+            <a:pPr indent="0" marL="0">
+              <a:buNone/>
+            </a:pPr>
+            <a:r>
+              <a:rPr lang="en-US" sz="1200" b="1" dirty="0">
+                <a:solidFill>
+                  <a:srgbClr val="F6F3EC"/>
+                </a:solidFill>
+                <a:latin typeface="Microsoft JhengHei" pitchFamily="34" charset="0"/>
+                <a:ea typeface="Microsoft JhengHei" pitchFamily="34" charset="-122"/>
+                <a:cs typeface="Microsoft JhengHei" pitchFamily="34" charset="-120"/>
+              </a:rPr>
+              <a:t>權限分級控管</a:t>
+            </a:r>
+            <a:endParaRPr lang="en-US" sz="1000" dirty="0"/>
+          </a:p>
+        </p:txBody>
+      </p:sp>
+      <p:sp>
+        <p:nvSpPr>
+          <p:cNvPr id="13" name="Text 10"/>
+          <p:cNvSpPr/>
+          <p:nvPr/>
+        </p:nvSpPr>
+        <p:spPr>
+          <a:xfrm>
+            <a:off x="914400" y="2660904"/>
+            <a:ext cx="4837176" cy="416966"/>
+          </a:xfrm>
+          <a:prstGeom prst="rect">
+            <a:avLst/>
+          </a:prstGeom>
+          <a:noFill/>
+          <a:ln/>
+        </p:spPr>
+        <p:txBody>
+          <a:bodyPr wrap="square" lIns="0" tIns="0" rIns="0" bIns="0" rtlCol="0" anchor="t"/>
+          <a:lstStyle/>
+          <a:p>
+            <a:pPr indent="0" marL="0">
+              <a:lnSpc>
+                <a:spcPct val="100000"/>
+              </a:lnSpc>
+              <a:buNone/>
+            </a:pPr>
+            <a:r>
+              <a:rPr lang="en-US" sz="980" dirty="0">
+                <a:solidFill>
+                  <a:srgbClr val="CDD8EC"/>
+                </a:solidFill>
+                <a:latin typeface="Microsoft JhengHei" pitchFamily="34" charset="0"/>
+                <a:ea typeface="Microsoft JhengHei" pitchFamily="34" charset="-122"/>
+                <a:cs typeface="Microsoft JhengHei" pitchFamily="34" charset="-120"/>
+              </a:rPr>
+              <a:t>住戶/物業/管理員三級角色 —— 後台每項操作皆經授權驗證</a:t>
+            </a:r>
+            <a:endParaRPr lang="en-US" sz="980" dirty="0"/>
+          </a:p>
+        </p:txBody>
+      </p:sp>
+      <p:sp>
+        <p:nvSpPr>
+          <p:cNvPr id="14" name="Text 11"/>
+          <p:cNvSpPr/>
+          <p:nvPr/>
+        </p:nvSpPr>
+        <p:spPr>
+          <a:xfrm>
+            <a:off x="694944" y="3105302"/>
+            <a:ext cx="5093208" cy="237744"/>
+          </a:xfrm>
+          <a:prstGeom prst="rect">
+            <a:avLst/>
+          </a:prstGeom>
+          <a:noFill/>
+          <a:ln/>
+        </p:spPr>
+        <p:txBody>
+          <a:bodyPr wrap="square" lIns="0" tIns="0" rIns="0" bIns="0" rtlCol="0" anchor="ctr"/>
+          <a:lstStyle/>
+          <a:p>
+            <a:pPr indent="0" marL="0">
+              <a:buNone/>
+            </a:pPr>
+            <a:r>
+              <a:rPr lang="en-US" sz="1000" dirty="0">
+                <a:solidFill>
+                  <a:srgbClr val="69D6A8"/>
+                </a:solidFill>
+                <a:latin typeface="Microsoft JhengHei" pitchFamily="34" charset="0"/>
+                <a:ea typeface="Microsoft JhengHei" pitchFamily="34" charset="-122"/>
+                <a:cs typeface="Microsoft JhengHei" pitchFamily="34" charset="-120"/>
+              </a:rPr>
+              <a:t>● </a:t>
+            </a:r>
+            <a:pPr indent="0" marL="0">
+              <a:buNone/>
+            </a:pPr>
+            <a:r>
+              <a:rPr lang="en-US" sz="1200" b="1" dirty="0">
+                <a:solidFill>
+                  <a:srgbClr val="F6F3EC"/>
+                </a:solidFill>
+                <a:latin typeface="Microsoft JhengHei" pitchFamily="34" charset="0"/>
+                <a:ea typeface="Microsoft JhengHei" pitchFamily="34" charset="-122"/>
+                <a:cs typeface="Microsoft JhengHei" pitchFamily="34" charset="-120"/>
+              </a:rPr>
+              <a:t>全面資安稽核</a:t>
+            </a:r>
+            <a:endParaRPr lang="en-US" sz="1000" dirty="0"/>
+          </a:p>
+        </p:txBody>
+      </p:sp>
+      <p:sp>
+        <p:nvSpPr>
+          <p:cNvPr id="15" name="Text 12"/>
+          <p:cNvSpPr/>
+          <p:nvPr/>
+        </p:nvSpPr>
+        <p:spPr>
+          <a:xfrm>
+            <a:off x="914400" y="3352190"/>
+            <a:ext cx="4837176" cy="416966"/>
+          </a:xfrm>
+          <a:prstGeom prst="rect">
+            <a:avLst/>
+          </a:prstGeom>
+          <a:noFill/>
+          <a:ln/>
+        </p:spPr>
+        <p:txBody>
+          <a:bodyPr wrap="square" lIns="0" tIns="0" rIns="0" bIns="0" rtlCol="0" anchor="t"/>
+          <a:lstStyle/>
+          <a:p>
+            <a:pPr indent="0" marL="0">
+              <a:lnSpc>
+                <a:spcPct val="100000"/>
+              </a:lnSpc>
+              <a:buNone/>
+            </a:pPr>
+            <a:r>
+              <a:rPr lang="en-US" sz="980" dirty="0">
+                <a:solidFill>
+                  <a:srgbClr val="CDD8EC"/>
+                </a:solidFill>
+                <a:latin typeface="Microsoft JhengHei" pitchFamily="34" charset="0"/>
+                <a:ea typeface="Microsoft JhengHei" pitchFamily="34" charset="-122"/>
+                <a:cs typeface="Microsoft JhengHei" pitchFamily="34" charset="-120"/>
+              </a:rPr>
+              <a:t>已完成整體安全稽核,發現項目全數修復並部署上線</a:t>
+            </a:r>
+            <a:endParaRPr lang="en-US" sz="980" dirty="0"/>
+          </a:p>
+        </p:txBody>
+      </p:sp>
+      <p:sp>
+        <p:nvSpPr>
+          <p:cNvPr id="16" name="Text 13"/>
+          <p:cNvSpPr/>
+          <p:nvPr/>
+        </p:nvSpPr>
+        <p:spPr>
+          <a:xfrm>
+            <a:off x="694944" y="3796589"/>
+            <a:ext cx="5093208" cy="237744"/>
+          </a:xfrm>
+          <a:prstGeom prst="rect">
+            <a:avLst/>
+          </a:prstGeom>
+          <a:noFill/>
+          <a:ln/>
+        </p:spPr>
+        <p:txBody>
+          <a:bodyPr wrap="square" lIns="0" tIns="0" rIns="0" bIns="0" rtlCol="0" anchor="ctr"/>
+          <a:lstStyle/>
+          <a:p>
+            <a:pPr indent="0" marL="0">
+              <a:buNone/>
+            </a:pPr>
+            <a:r>
+              <a:rPr lang="en-US" sz="1000" dirty="0">
+                <a:solidFill>
+                  <a:srgbClr val="69D6A8"/>
+                </a:solidFill>
+                <a:latin typeface="Microsoft JhengHei" pitchFamily="34" charset="0"/>
+                <a:ea typeface="Microsoft JhengHei" pitchFamily="34" charset="-122"/>
+                <a:cs typeface="Microsoft JhengHei" pitchFamily="34" charset="-120"/>
+              </a:rPr>
+              <a:t>● </a:t>
+            </a:r>
+            <a:pPr indent="0" marL="0">
+              <a:buNone/>
+            </a:pPr>
+            <a:r>
+              <a:rPr lang="en-US" sz="1200" b="1" dirty="0">
+                <a:solidFill>
+                  <a:srgbClr val="F6F3EC"/>
+                </a:solidFill>
+                <a:latin typeface="Microsoft JhengHei" pitchFamily="34" charset="0"/>
+                <a:ea typeface="Microsoft JhengHei" pitchFamily="34" charset="-122"/>
+                <a:cs typeface="Microsoft JhengHei" pitchFamily="34" charset="-120"/>
+              </a:rPr>
+              <a:t>加密與金鑰管理</a:t>
+            </a:r>
+            <a:endParaRPr lang="en-US" sz="1000" dirty="0"/>
+          </a:p>
+        </p:txBody>
+      </p:sp>
+      <p:sp>
+        <p:nvSpPr>
+          <p:cNvPr id="17" name="Text 14"/>
+          <p:cNvSpPr/>
+          <p:nvPr/>
+        </p:nvSpPr>
+        <p:spPr>
+          <a:xfrm>
+            <a:off x="914400" y="4043477"/>
+            <a:ext cx="4837176" cy="416966"/>
+          </a:xfrm>
+          <a:prstGeom prst="rect">
+            <a:avLst/>
+          </a:prstGeom>
+          <a:noFill/>
+          <a:ln/>
+        </p:spPr>
+        <p:txBody>
+          <a:bodyPr wrap="square" lIns="0" tIns="0" rIns="0" bIns="0" rtlCol="0" anchor="t"/>
+          <a:lstStyle/>
+          <a:p>
+            <a:pPr indent="0" marL="0">
+              <a:lnSpc>
+                <a:spcPct val="100000"/>
+              </a:lnSpc>
+              <a:buNone/>
+            </a:pPr>
+            <a:r>
+              <a:rPr lang="en-US" sz="980" dirty="0">
+                <a:solidFill>
+                  <a:srgbClr val="CDD8EC"/>
+                </a:solidFill>
+                <a:latin typeface="Microsoft JhengHei" pitchFamily="34" charset="0"/>
+                <a:ea typeface="Microsoft JhengHei" pitchFamily="34" charset="-122"/>
+                <a:cs typeface="Microsoft JhengHei" pitchFamily="34" charset="-120"/>
+              </a:rPr>
+              <a:t>全程 HTTPS/TLS 加密;金鑰以環境變數管理,具輪替流程</a:t>
+            </a:r>
+            <a:endParaRPr lang="en-US" sz="980" dirty="0"/>
+          </a:p>
+        </p:txBody>
+      </p:sp>
+      <p:sp>
+        <p:nvSpPr>
+          <p:cNvPr id="18" name="Text 15"/>
+          <p:cNvSpPr/>
+          <p:nvPr/>
+        </p:nvSpPr>
+        <p:spPr>
+          <a:xfrm>
+            <a:off x="694944" y="4487875"/>
+            <a:ext cx="5093208" cy="237744"/>
+          </a:xfrm>
+          <a:prstGeom prst="rect">
+            <a:avLst/>
+          </a:prstGeom>
+          <a:noFill/>
+          <a:ln/>
+        </p:spPr>
+        <p:txBody>
+          <a:bodyPr wrap="square" lIns="0" tIns="0" rIns="0" bIns="0" rtlCol="0" anchor="ctr"/>
+          <a:lstStyle/>
+          <a:p>
+            <a:pPr indent="0" marL="0">
+              <a:buNone/>
+            </a:pPr>
+            <a:r>
+              <a:rPr lang="en-US" sz="1000" dirty="0">
+                <a:solidFill>
+                  <a:srgbClr val="C9A35A"/>
+                </a:solidFill>
+                <a:latin typeface="Microsoft JhengHei" pitchFamily="34" charset="0"/>
+                <a:ea typeface="Microsoft JhengHei" pitchFamily="34" charset="-122"/>
+                <a:cs typeface="Microsoft JhengHei" pitchFamily="34" charset="-120"/>
+              </a:rPr>
+              <a:t>● </a:t>
+            </a:r>
+            <a:pPr indent="0" marL="0">
+              <a:buNone/>
+            </a:pPr>
+            <a:r>
+              <a:rPr lang="en-US" sz="1200" b="1" dirty="0">
+                <a:solidFill>
+                  <a:srgbClr val="F6F3EC"/>
+                </a:solidFill>
+                <a:latin typeface="Microsoft JhengHei" pitchFamily="34" charset="0"/>
+                <a:ea typeface="Microsoft JhengHei" pitchFamily="34" charset="-122"/>
+                <a:cs typeface="Microsoft JhengHei" pitchFamily="34" charset="-120"/>
+              </a:rPr>
+              <a:t>網路分段隔離</a:t>
+            </a:r>
+            <a:endParaRPr lang="en-US" sz="1000" dirty="0"/>
+          </a:p>
+        </p:txBody>
+      </p:sp>
+      <p:sp>
+        <p:nvSpPr>
+          <p:cNvPr id="19" name="Text 16"/>
+          <p:cNvSpPr/>
+          <p:nvPr/>
+        </p:nvSpPr>
+        <p:spPr>
+          <a:xfrm>
+            <a:off x="914400" y="4734763"/>
+            <a:ext cx="4837176" cy="416966"/>
+          </a:xfrm>
+          <a:prstGeom prst="rect">
+            <a:avLst/>
+          </a:prstGeom>
+          <a:noFill/>
+          <a:ln/>
+        </p:spPr>
+        <p:txBody>
+          <a:bodyPr wrap="square" lIns="0" tIns="0" rIns="0" bIns="0" rtlCol="0" anchor="t"/>
+          <a:lstStyle/>
+          <a:p>
+            <a:pPr indent="0" marL="0">
+              <a:lnSpc>
+                <a:spcPct val="100000"/>
+              </a:lnSpc>
+              <a:buNone/>
+            </a:pPr>
+            <a:r>
+              <a:rPr lang="en-US" sz="980" dirty="0">
+                <a:solidFill>
+                  <a:srgbClr val="CDD8EC"/>
+                </a:solidFill>
+                <a:latin typeface="Microsoft JhengHei" pitchFamily="34" charset="0"/>
+                <a:ea typeface="Microsoft JhengHei" pitchFamily="34" charset="-122"/>
+                <a:cs typeface="Microsoft JhengHei" pitchFamily="34" charset="-120"/>
+              </a:rPr>
+              <a:t>IoT/管理/訪客 VLAN 隔離(P1 佈建),設備不直通外網</a:t>
+            </a:r>
+            <a:endParaRPr lang="en-US" sz="980" dirty="0"/>
+          </a:p>
+        </p:txBody>
+      </p:sp>
+      <p:sp>
+        <p:nvSpPr>
+          <p:cNvPr id="20" name="Text 17"/>
+          <p:cNvSpPr/>
+          <p:nvPr/>
+        </p:nvSpPr>
+        <p:spPr>
+          <a:xfrm>
+            <a:off x="694944" y="5179162"/>
+            <a:ext cx="5093208" cy="237744"/>
+          </a:xfrm>
+          <a:prstGeom prst="rect">
+            <a:avLst/>
+          </a:prstGeom>
+          <a:noFill/>
+          <a:ln/>
+        </p:spPr>
+        <p:txBody>
+          <a:bodyPr wrap="square" lIns="0" tIns="0" rIns="0" bIns="0" rtlCol="0" anchor="ctr"/>
+          <a:lstStyle/>
+          <a:p>
+            <a:pPr indent="0" marL="0">
+              <a:buNone/>
+            </a:pPr>
+            <a:r>
+              <a:rPr lang="en-US" sz="1000" dirty="0">
+                <a:solidFill>
+                  <a:srgbClr val="69D6A8"/>
+                </a:solidFill>
+                <a:latin typeface="Microsoft JhengHei" pitchFamily="34" charset="0"/>
+                <a:ea typeface="Microsoft JhengHei" pitchFamily="34" charset="-122"/>
+                <a:cs typeface="Microsoft JhengHei" pitchFamily="34" charset="-120"/>
+              </a:rPr>
+              <a:t>● </a:t>
+            </a:r>
+            <a:pPr indent="0" marL="0">
+              <a:buNone/>
+            </a:pPr>
+            <a:r>
+              <a:rPr lang="en-US" sz="1200" b="1" dirty="0">
+                <a:solidFill>
+                  <a:srgbClr val="F6F3EC"/>
+                </a:solidFill>
+                <a:latin typeface="Microsoft JhengHei" pitchFamily="34" charset="0"/>
+                <a:ea typeface="Microsoft JhengHei" pitchFamily="34" charset="-122"/>
+                <a:cs typeface="Microsoft JhengHei" pitchFamily="34" charset="-120"/>
+              </a:rPr>
+              <a:t>紀錄可追溯</a:t>
+            </a:r>
+            <a:endParaRPr lang="en-US" sz="1000" dirty="0"/>
+          </a:p>
+        </p:txBody>
+      </p:sp>
+      <p:sp>
+        <p:nvSpPr>
+          <p:cNvPr id="21" name="Text 18"/>
+          <p:cNvSpPr/>
+          <p:nvPr/>
+        </p:nvSpPr>
+        <p:spPr>
+          <a:xfrm>
+            <a:off x="914400" y="5426050"/>
+            <a:ext cx="4837176" cy="416966"/>
+          </a:xfrm>
+          <a:prstGeom prst="rect">
+            <a:avLst/>
+          </a:prstGeom>
+          <a:noFill/>
+          <a:ln/>
+        </p:spPr>
+        <p:txBody>
+          <a:bodyPr wrap="square" lIns="0" tIns="0" rIns="0" bIns="0" rtlCol="0" anchor="t"/>
+          <a:lstStyle/>
+          <a:p>
+            <a:pPr indent="0" marL="0">
+              <a:lnSpc>
+                <a:spcPct val="100000"/>
+              </a:lnSpc>
+              <a:buNone/>
+            </a:pPr>
+            <a:r>
+              <a:rPr lang="en-US" sz="980" dirty="0">
+                <a:solidFill>
+                  <a:srgbClr val="CDD8EC"/>
+                </a:solidFill>
+                <a:latin typeface="Microsoft JhengHei" pitchFamily="34" charset="0"/>
+                <a:ea typeface="Microsoft JhengHei" pitchFamily="34" charset="-122"/>
+                <a:cs typeface="Microsoft JhengHei" pitchFamily="34" charset="-120"/>
+              </a:rPr>
+              <a:t>訊息與操作事件留存紀錄,異常行為可稽核回溯</a:t>
+            </a:r>
+            <a:endParaRPr lang="en-US" sz="980" dirty="0"/>
+          </a:p>
+        </p:txBody>
+      </p:sp>
+      <p:sp>
+        <p:nvSpPr>
+          <p:cNvPr id="22" name="Shape 19"/>
+          <p:cNvSpPr/>
+          <p:nvPr/>
+        </p:nvSpPr>
+        <p:spPr>
+          <a:xfrm>
+            <a:off x="6181344" y="1572768"/>
+            <a:ext cx="5550408" cy="4370832"/>
+          </a:xfrm>
+          <a:prstGeom prst="roundRect">
+            <a:avLst>
+              <a:gd name="adj" fmla="val 2301"/>
+            </a:avLst>
+          </a:prstGeom>
+          <a:solidFill>
+            <a:srgbClr val="14253F">
+              <a:alpha val="88000"/>
+            </a:srgbClr>
+          </a:solidFill>
+          <a:ln w="9525">
+            <a:solidFill>
+              <a:srgbClr val="C9A35A">
+                <a:alpha val="42000"/>
+              </a:srgbClr>
+            </a:solidFill>
+            <a:prstDash val="solid"/>
+          </a:ln>
+          <a:effectLst>
+            <a:outerShdw sx="100000" sy="100000" kx="0" ky="0" algn="bl" rotWithShape="0" blurRad="101600" dist="38100" dir="5400000">
+              <a:srgbClr val="000000">
+                <a:alpha val="30000"/>
+              </a:srgbClr>
+            </a:outerShdw>
+          </a:effectLst>
+        </p:spPr>
+      </p:sp>
+      <p:sp>
+        <p:nvSpPr>
+          <p:cNvPr id="23" name="Shape 20"/>
+          <p:cNvSpPr/>
+          <p:nvPr/>
+        </p:nvSpPr>
+        <p:spPr>
+          <a:xfrm>
+            <a:off x="6400800" y="1719072"/>
+            <a:ext cx="457200" cy="457200"/>
+          </a:xfrm>
+          <a:prstGeom prst="ellipse">
+            <a:avLst/>
+          </a:prstGeom>
+          <a:solidFill>
+            <a:srgbClr val="0F1C33"/>
+          </a:solidFill>
+          <a:ln w="10160">
+            <a:solidFill>
+              <a:srgbClr val="C9A35A">
+                <a:alpha val="65000"/>
+              </a:srgbClr>
+            </a:solidFill>
+            <a:prstDash val="solid"/>
+          </a:ln>
+        </p:spPr>
+      </p:sp>
+      <p:pic>
+        <p:nvPicPr>
+          <p:cNvPr id="24" name="Image 1" descr="preencoded.png">    </p:cNvPr>
+          <p:cNvPicPr>
+            <a:picLocks noChangeAspect="1"/>
+          </p:cNvPicPr>
+          <p:nvPr/>
+        </p:nvPicPr>
+        <p:blipFill>
+          <a:blip r:embed="rId3"/>
+          <a:stretch>
+            <a:fillRect/>
+          </a:stretch>
+        </p:blipFill>
+        <p:spPr>
+          <a:xfrm>
+            <a:off x="6515100" y="1833372"/>
+            <a:ext cx="228600" cy="228600"/>
+          </a:xfrm>
+          <a:prstGeom prst="rect">
+            <a:avLst/>
+          </a:prstGeom>
+        </p:spPr>
+      </p:pic>
+      <p:sp>
+        <p:nvSpPr>
+          <p:cNvPr id="25" name="Text 21"/>
+          <p:cNvSpPr/>
+          <p:nvPr/>
+        </p:nvSpPr>
+        <p:spPr>
+          <a:xfrm>
+            <a:off x="6986016" y="1719072"/>
+            <a:ext cx="4544568" cy="457200"/>
+          </a:xfrm>
+          <a:prstGeom prst="rect">
+            <a:avLst/>
+          </a:prstGeom>
+          <a:noFill/>
+          <a:ln/>
+        </p:spPr>
+        <p:txBody>
+          <a:bodyPr wrap="square" lIns="0" tIns="0" rIns="0" bIns="0" rtlCol="0" anchor="ctr"/>
+          <a:lstStyle/>
+          <a:p>
+            <a:pPr indent="0" marL="0">
+              <a:buNone/>
+            </a:pPr>
+            <a:r>
+              <a:rPr lang="en-US" sz="1500" b="1" dirty="0">
+                <a:solidFill>
+                  <a:srgbClr val="F6F3EC"/>
+                </a:solidFill>
+                <a:latin typeface="Microsoft JhengHei" pitchFamily="34" charset="0"/>
+                <a:ea typeface="Microsoft JhengHei" pitchFamily="34" charset="-122"/>
+                <a:cs typeface="Microsoft JhengHei" pitchFamily="34" charset="-120"/>
+              </a:rPr>
+              <a:t>維運保障</a:t>
+            </a:r>
+            <a:endParaRPr lang="en-US" sz="1500" dirty="0"/>
+          </a:p>
+        </p:txBody>
+      </p:sp>
+      <p:sp>
+        <p:nvSpPr>
+          <p:cNvPr id="26" name="Shape 22"/>
+          <p:cNvSpPr/>
+          <p:nvPr/>
+        </p:nvSpPr>
+        <p:spPr>
+          <a:xfrm>
+            <a:off x="6400800" y="2322576"/>
+            <a:ext cx="5111496" cy="0"/>
+          </a:xfrm>
+          <a:prstGeom prst="line">
+            <a:avLst/>
+          </a:prstGeom>
+          <a:noFill/>
+          <a:ln w="6350">
+            <a:solidFill>
+              <a:srgbClr val="C9A35A">
+                <a:alpha val="45000"/>
+              </a:srgbClr>
+            </a:solidFill>
+            <a:prstDash val="dash"/>
+          </a:ln>
+        </p:spPr>
+      </p:sp>
+      <p:sp>
+        <p:nvSpPr>
+          <p:cNvPr id="27" name="Text 23"/>
+          <p:cNvSpPr/>
+          <p:nvPr/>
+        </p:nvSpPr>
+        <p:spPr>
+          <a:xfrm>
+            <a:off x="6419088" y="2414016"/>
+            <a:ext cx="5093208" cy="237744"/>
+          </a:xfrm>
+          <a:prstGeom prst="rect">
+            <a:avLst/>
+          </a:prstGeom>
+          <a:noFill/>
+          <a:ln/>
+        </p:spPr>
+        <p:txBody>
+          <a:bodyPr wrap="square" lIns="0" tIns="0" rIns="0" bIns="0" rtlCol="0" anchor="ctr"/>
+          <a:lstStyle/>
+          <a:p>
+            <a:pPr indent="0" marL="0">
+              <a:buNone/>
+            </a:pPr>
+            <a:r>
+              <a:rPr lang="en-US" sz="1000" dirty="0">
+                <a:solidFill>
+                  <a:srgbClr val="69D6A8"/>
+                </a:solidFill>
+                <a:latin typeface="Microsoft JhengHei" pitchFamily="34" charset="0"/>
+                <a:ea typeface="Microsoft JhengHei" pitchFamily="34" charset="-122"/>
+                <a:cs typeface="Microsoft JhengHei" pitchFamily="34" charset="-120"/>
+              </a:rPr>
+              <a:t>● </a:t>
+            </a:r>
+            <a:pPr indent="0" marL="0">
+              <a:buNone/>
+            </a:pPr>
+            <a:r>
+              <a:rPr lang="en-US" sz="1200" b="1" dirty="0">
+                <a:solidFill>
+                  <a:srgbClr val="F6F3EC"/>
+                </a:solidFill>
+                <a:latin typeface="Microsoft JhengHei" pitchFamily="34" charset="0"/>
+                <a:ea typeface="Microsoft JhengHei" pitchFamily="34" charset="-122"/>
+                <a:cs typeface="Microsoft JhengHei" pitchFamily="34" charset="-120"/>
+              </a:rPr>
+              <a:t>健康監控儀表板</a:t>
+            </a:r>
+            <a:endParaRPr lang="en-US" sz="1000" dirty="0"/>
+          </a:p>
+        </p:txBody>
+      </p:sp>
+      <p:sp>
+        <p:nvSpPr>
+          <p:cNvPr id="28" name="Text 24"/>
+          <p:cNvSpPr/>
+          <p:nvPr/>
+        </p:nvSpPr>
+        <p:spPr>
+          <a:xfrm>
+            <a:off x="6638544" y="2660904"/>
+            <a:ext cx="4837176" cy="416966"/>
+          </a:xfrm>
+          <a:prstGeom prst="rect">
+            <a:avLst/>
+          </a:prstGeom>
+          <a:noFill/>
+          <a:ln/>
+        </p:spPr>
+        <p:txBody>
+          <a:bodyPr wrap="square" lIns="0" tIns="0" rIns="0" bIns="0" rtlCol="0" anchor="t"/>
+          <a:lstStyle/>
+          <a:p>
+            <a:pPr indent="0" marL="0">
+              <a:lnSpc>
+                <a:spcPct val="100000"/>
+              </a:lnSpc>
+              <a:buNone/>
+            </a:pPr>
+            <a:r>
+              <a:rPr lang="en-US" sz="980" dirty="0">
+                <a:solidFill>
+                  <a:srgbClr val="CDD8EC"/>
+                </a:solidFill>
+                <a:latin typeface="Microsoft JhengHei" pitchFamily="34" charset="0"/>
+                <a:ea typeface="Microsoft JhengHei" pitchFamily="34" charset="-122"/>
+                <a:cs typeface="Microsoft JhengHei" pitchFamily="34" charset="-120"/>
+              </a:rPr>
+              <a:t>LINE 通道流量/錯誤率即時監控,異常提前掌握</a:t>
+            </a:r>
+            <a:endParaRPr lang="en-US" sz="980" dirty="0"/>
+          </a:p>
+        </p:txBody>
+      </p:sp>
+      <p:sp>
+        <p:nvSpPr>
+          <p:cNvPr id="29" name="Text 25"/>
+          <p:cNvSpPr/>
+          <p:nvPr/>
+        </p:nvSpPr>
+        <p:spPr>
+          <a:xfrm>
+            <a:off x="6419088" y="3105302"/>
+            <a:ext cx="5093208" cy="237744"/>
+          </a:xfrm>
+          <a:prstGeom prst="rect">
+            <a:avLst/>
+          </a:prstGeom>
+          <a:noFill/>
+          <a:ln/>
+        </p:spPr>
+        <p:txBody>
+          <a:bodyPr wrap="square" lIns="0" tIns="0" rIns="0" bIns="0" rtlCol="0" anchor="ctr"/>
+          <a:lstStyle/>
+          <a:p>
+            <a:pPr indent="0" marL="0">
+              <a:buNone/>
+            </a:pPr>
+            <a:r>
+              <a:rPr lang="en-US" sz="1000" dirty="0">
+                <a:solidFill>
+                  <a:srgbClr val="69D6A8"/>
+                </a:solidFill>
+                <a:latin typeface="Microsoft JhengHei" pitchFamily="34" charset="0"/>
+                <a:ea typeface="Microsoft JhengHei" pitchFamily="34" charset="-122"/>
+                <a:cs typeface="Microsoft JhengHei" pitchFamily="34" charset="-120"/>
+              </a:rPr>
+              <a:t>● </a:t>
+            </a:r>
+            <a:pPr indent="0" marL="0">
+              <a:buNone/>
+            </a:pPr>
+            <a:r>
+              <a:rPr lang="en-US" sz="1200" b="1" dirty="0">
+                <a:solidFill>
+                  <a:srgbClr val="F6F3EC"/>
+                </a:solidFill>
+                <a:latin typeface="Microsoft JhengHei" pitchFamily="34" charset="0"/>
+                <a:ea typeface="Microsoft JhengHei" pitchFamily="34" charset="-122"/>
+                <a:cs typeface="Microsoft JhengHei" pitchFamily="34" charset="-120"/>
+              </a:rPr>
+              <a:t>不中斷更新</a:t>
+            </a:r>
+            <a:endParaRPr lang="en-US" sz="1000" dirty="0"/>
+          </a:p>
+        </p:txBody>
+      </p:sp>
+      <p:sp>
+        <p:nvSpPr>
+          <p:cNvPr id="30" name="Text 26"/>
+          <p:cNvSpPr/>
+          <p:nvPr/>
+        </p:nvSpPr>
+        <p:spPr>
+          <a:xfrm>
+            <a:off x="6638544" y="3352190"/>
+            <a:ext cx="4837176" cy="416966"/>
+          </a:xfrm>
+          <a:prstGeom prst="rect">
+            <a:avLst/>
+          </a:prstGeom>
+          <a:noFill/>
+          <a:ln/>
+        </p:spPr>
+        <p:txBody>
+          <a:bodyPr wrap="square" lIns="0" tIns="0" rIns="0" bIns="0" rtlCol="0" anchor="t"/>
+          <a:lstStyle/>
+          <a:p>
+            <a:pPr indent="0" marL="0">
+              <a:lnSpc>
+                <a:spcPct val="100000"/>
+              </a:lnSpc>
+              <a:buNone/>
+            </a:pPr>
+            <a:r>
+              <a:rPr lang="en-US" sz="980" dirty="0">
+                <a:solidFill>
+                  <a:srgbClr val="CDD8EC"/>
+                </a:solidFill>
+                <a:latin typeface="Microsoft JhengHei" pitchFamily="34" charset="0"/>
+                <a:ea typeface="Microsoft JhengHei" pitchFamily="34" charset="-122"/>
+                <a:cs typeface="Microsoft JhengHei" pitchFamily="34" charset="-120"/>
+              </a:rPr>
+              <a:t>雲端自動化部署 —— 功能迭代與修補不停機</a:t>
+            </a:r>
+            <a:endParaRPr lang="en-US" sz="980" dirty="0"/>
+          </a:p>
+        </p:txBody>
+      </p:sp>
+      <p:sp>
+        <p:nvSpPr>
+          <p:cNvPr id="31" name="Text 27"/>
+          <p:cNvSpPr/>
+          <p:nvPr/>
+        </p:nvSpPr>
+        <p:spPr>
+          <a:xfrm>
+            <a:off x="6419088" y="3796589"/>
+            <a:ext cx="5093208" cy="237744"/>
+          </a:xfrm>
+          <a:prstGeom prst="rect">
+            <a:avLst/>
+          </a:prstGeom>
+          <a:noFill/>
+          <a:ln/>
+        </p:spPr>
+        <p:txBody>
+          <a:bodyPr wrap="square" lIns="0" tIns="0" rIns="0" bIns="0" rtlCol="0" anchor="ctr"/>
+          <a:lstStyle/>
+          <a:p>
+            <a:pPr indent="0" marL="0">
+              <a:buNone/>
+            </a:pPr>
+            <a:r>
+              <a:rPr lang="en-US" sz="1000" dirty="0">
+                <a:solidFill>
+                  <a:srgbClr val="C9A35A"/>
+                </a:solidFill>
+                <a:latin typeface="Microsoft JhengHei" pitchFamily="34" charset="0"/>
+                <a:ea typeface="Microsoft JhengHei" pitchFamily="34" charset="-122"/>
+                <a:cs typeface="Microsoft JhengHei" pitchFamily="34" charset="-120"/>
+              </a:rPr>
+              <a:t>● </a:t>
+            </a:r>
+            <a:pPr indent="0" marL="0">
+              <a:buNone/>
+            </a:pPr>
+            <a:r>
+              <a:rPr lang="en-US" sz="1200" b="1" dirty="0">
+                <a:solidFill>
+                  <a:srgbClr val="F6F3EC"/>
+                </a:solidFill>
+                <a:latin typeface="Microsoft JhengHei" pitchFamily="34" charset="0"/>
+                <a:ea typeface="Microsoft JhengHei" pitchFamily="34" charset="-122"/>
+                <a:cs typeface="Microsoft JhengHei" pitchFamily="34" charset="-120"/>
+              </a:rPr>
+              <a:t>斷電・離線韌性</a:t>
+            </a:r>
+            <a:endParaRPr lang="en-US" sz="1000" dirty="0"/>
+          </a:p>
+        </p:txBody>
+      </p:sp>
+      <p:sp>
+        <p:nvSpPr>
+          <p:cNvPr id="32" name="Text 28"/>
+          <p:cNvSpPr/>
+          <p:nvPr/>
+        </p:nvSpPr>
+        <p:spPr>
+          <a:xfrm>
+            <a:off x="6638544" y="4043477"/>
+            <a:ext cx="4837176" cy="416966"/>
+          </a:xfrm>
+          <a:prstGeom prst="rect">
+            <a:avLst/>
+          </a:prstGeom>
+          <a:noFill/>
+          <a:ln/>
+        </p:spPr>
+        <p:txBody>
+          <a:bodyPr wrap="square" lIns="0" tIns="0" rIns="0" bIns="0" rtlCol="0" anchor="t"/>
+          <a:lstStyle/>
+          <a:p>
+            <a:pPr indent="0" marL="0">
+              <a:lnSpc>
+                <a:spcPct val="100000"/>
+              </a:lnSpc>
+              <a:buNone/>
+            </a:pPr>
+            <a:r>
+              <a:rPr lang="en-US" sz="980" dirty="0">
+                <a:solidFill>
+                  <a:srgbClr val="CDD8EC"/>
+                </a:solidFill>
+                <a:latin typeface="Microsoft JhengHei" pitchFamily="34" charset="0"/>
+                <a:ea typeface="Microsoft JhengHei" pitchFamily="34" charset="-122"/>
+                <a:cs typeface="Microsoft JhengHei" pitchFamily="34" charset="-120"/>
+              </a:rPr>
+              <a:t>機房 UPS 續航;實體門禁獨立運作,平台恢復後資料補同步</a:t>
+            </a:r>
+            <a:endParaRPr lang="en-US" sz="980" dirty="0"/>
+          </a:p>
+        </p:txBody>
+      </p:sp>
+      <p:sp>
+        <p:nvSpPr>
+          <p:cNvPr id="33" name="Text 29"/>
+          <p:cNvSpPr/>
+          <p:nvPr/>
+        </p:nvSpPr>
+        <p:spPr>
+          <a:xfrm>
+            <a:off x="6419088" y="4487875"/>
+            <a:ext cx="5093208" cy="237744"/>
+          </a:xfrm>
+          <a:prstGeom prst="rect">
+            <a:avLst/>
+          </a:prstGeom>
+          <a:noFill/>
+          <a:ln/>
+        </p:spPr>
+        <p:txBody>
+          <a:bodyPr wrap="square" lIns="0" tIns="0" rIns="0" bIns="0" rtlCol="0" anchor="ctr"/>
+          <a:lstStyle/>
+          <a:p>
+            <a:pPr indent="0" marL="0">
+              <a:buNone/>
+            </a:pPr>
+            <a:r>
+              <a:rPr lang="en-US" sz="1000" dirty="0">
+                <a:solidFill>
+                  <a:srgbClr val="6FB1FF"/>
+                </a:solidFill>
+                <a:latin typeface="Microsoft JhengHei" pitchFamily="34" charset="0"/>
+                <a:ea typeface="Microsoft JhengHei" pitchFamily="34" charset="-122"/>
+                <a:cs typeface="Microsoft JhengHei" pitchFamily="34" charset="-120"/>
+              </a:rPr>
+              <a:t>○ </a:t>
+            </a:r>
+            <a:pPr indent="0" marL="0">
+              <a:buNone/>
+            </a:pPr>
+            <a:r>
+              <a:rPr lang="en-US" sz="1200" b="1" dirty="0">
+                <a:solidFill>
+                  <a:srgbClr val="F6F3EC"/>
+                </a:solidFill>
+                <a:latin typeface="Microsoft JhengHei" pitchFamily="34" charset="0"/>
+                <a:ea typeface="Microsoft JhengHei" pitchFamily="34" charset="-122"/>
+                <a:cs typeface="Microsoft JhengHei" pitchFamily="34" charset="-120"/>
+              </a:rPr>
+              <a:t>資料持久與自主</a:t>
+            </a:r>
+            <a:endParaRPr lang="en-US" sz="1000" dirty="0"/>
+          </a:p>
+        </p:txBody>
+      </p:sp>
+      <p:sp>
+        <p:nvSpPr>
+          <p:cNvPr id="34" name="Text 30"/>
+          <p:cNvSpPr/>
+          <p:nvPr/>
+        </p:nvSpPr>
+        <p:spPr>
+          <a:xfrm>
+            <a:off x="6638544" y="4734763"/>
+            <a:ext cx="4837176" cy="416966"/>
+          </a:xfrm>
+          <a:prstGeom prst="rect">
+            <a:avLst/>
+          </a:prstGeom>
+          <a:noFill/>
+          <a:ln/>
+        </p:spPr>
+        <p:txBody>
+          <a:bodyPr wrap="square" lIns="0" tIns="0" rIns="0" bIns="0" rtlCol="0" anchor="t"/>
+          <a:lstStyle/>
+          <a:p>
+            <a:pPr indent="0" marL="0">
+              <a:lnSpc>
+                <a:spcPct val="100000"/>
+              </a:lnSpc>
+              <a:buNone/>
+            </a:pPr>
+            <a:r>
+              <a:rPr lang="en-US" sz="980" dirty="0">
+                <a:solidFill>
+                  <a:srgbClr val="CDD8EC"/>
+                </a:solidFill>
+                <a:latin typeface="Microsoft JhengHei" pitchFamily="34" charset="0"/>
+                <a:ea typeface="Microsoft JhengHei" pitchFamily="34" charset="-122"/>
+                <a:cs typeface="Microsoft JhengHei" pitchFamily="34" charset="-120"/>
+              </a:rPr>
+              <a:t>持久磁碟儲存;P3 可升級自架 PostgreSQL,資料完全落地</a:t>
+            </a:r>
+            <a:endParaRPr lang="en-US" sz="980" dirty="0"/>
+          </a:p>
+        </p:txBody>
+      </p:sp>
+      <p:sp>
+        <p:nvSpPr>
+          <p:cNvPr id="35" name="Text 31"/>
+          <p:cNvSpPr/>
+          <p:nvPr/>
+        </p:nvSpPr>
+        <p:spPr>
+          <a:xfrm>
+            <a:off x="6419088" y="5179162"/>
+            <a:ext cx="5093208" cy="237744"/>
+          </a:xfrm>
+          <a:prstGeom prst="rect">
+            <a:avLst/>
+          </a:prstGeom>
+          <a:noFill/>
+          <a:ln/>
+        </p:spPr>
+        <p:txBody>
+          <a:bodyPr wrap="square" lIns="0" tIns="0" rIns="0" bIns="0" rtlCol="0" anchor="ctr"/>
+          <a:lstStyle/>
+          <a:p>
+            <a:pPr indent="0" marL="0">
+              <a:buNone/>
+            </a:pPr>
+            <a:r>
+              <a:rPr lang="en-US" sz="1000" dirty="0">
+                <a:solidFill>
+                  <a:srgbClr val="69D6A8"/>
+                </a:solidFill>
+                <a:latin typeface="Microsoft JhengHei" pitchFamily="34" charset="0"/>
+                <a:ea typeface="Microsoft JhengHei" pitchFamily="34" charset="-122"/>
+                <a:cs typeface="Microsoft JhengHei" pitchFamily="34" charset="-120"/>
+              </a:rPr>
+              <a:t>● </a:t>
+            </a:r>
+            <a:pPr indent="0" marL="0">
+              <a:buNone/>
+            </a:pPr>
+            <a:r>
+              <a:rPr lang="en-US" sz="1200" b="1" dirty="0">
+                <a:solidFill>
+                  <a:srgbClr val="F6F3EC"/>
+                </a:solidFill>
+                <a:latin typeface="Microsoft JhengHei" pitchFamily="34" charset="0"/>
+                <a:ea typeface="Microsoft JhengHei" pitchFamily="34" charset="-122"/>
+                <a:cs typeface="Microsoft JhengHei" pitchFamily="34" charset="-120"/>
+              </a:rPr>
+              <a:t>維運支援</a:t>
+            </a:r>
+            <a:endParaRPr lang="en-US" sz="1000" dirty="0"/>
+          </a:p>
+        </p:txBody>
+      </p:sp>
+      <p:sp>
+        <p:nvSpPr>
+          <p:cNvPr id="36" name="Text 32"/>
+          <p:cNvSpPr/>
+          <p:nvPr/>
+        </p:nvSpPr>
+        <p:spPr>
+          <a:xfrm>
+            <a:off x="6638544" y="5426050"/>
+            <a:ext cx="4837176" cy="416966"/>
+          </a:xfrm>
+          <a:prstGeom prst="rect">
+            <a:avLst/>
+          </a:prstGeom>
+          <a:noFill/>
+          <a:ln/>
+        </p:spPr>
+        <p:txBody>
+          <a:bodyPr wrap="square" lIns="0" tIns="0" rIns="0" bIns="0" rtlCol="0" anchor="t"/>
+          <a:lstStyle/>
+          <a:p>
+            <a:pPr indent="0" marL="0">
+              <a:lnSpc>
+                <a:spcPct val="100000"/>
+              </a:lnSpc>
+              <a:buNone/>
+            </a:pPr>
+            <a:r>
+              <a:rPr lang="en-US" sz="980" dirty="0">
+                <a:solidFill>
+                  <a:srgbClr val="CDD8EC"/>
+                </a:solidFill>
+                <a:latin typeface="Microsoft JhengHei" pitchFamily="34" charset="0"/>
+                <a:ea typeface="Microsoft JhengHei" pitchFamily="34" charset="-122"/>
+                <a:cs typeface="Microsoft JhengHei" pitchFamily="34" charset="-120"/>
+              </a:rPr>
+              <a:t>平台方負責監控、版本更新與技術支援(見導入分工)</a:t>
+            </a:r>
+            <a:endParaRPr lang="en-US" sz="980" dirty="0"/>
+          </a:p>
+        </p:txBody>
+      </p:sp>
+      <p:sp>
+        <p:nvSpPr>
+          <p:cNvPr id="37" name="Text 33"/>
+          <p:cNvSpPr/>
+          <p:nvPr/>
+        </p:nvSpPr>
+        <p:spPr>
+          <a:xfrm>
+            <a:off x="457200" y="6126480"/>
+            <a:ext cx="11274552" cy="274320"/>
+          </a:xfrm>
+          <a:prstGeom prst="rect">
+            <a:avLst/>
+          </a:prstGeom>
+          <a:noFill/>
+          <a:ln/>
+        </p:spPr>
+        <p:txBody>
+          <a:bodyPr wrap="square" lIns="0" tIns="0" rIns="0" bIns="0" rtlCol="0" anchor="ctr"/>
+          <a:lstStyle/>
+          <a:p>
+            <a:pPr indent="0" marL="0">
+              <a:buNone/>
+            </a:pPr>
+            <a:r>
+              <a:rPr lang="en-US" sz="1000" i="1" dirty="0">
+                <a:solidFill>
+                  <a:srgbClr val="5E74A0"/>
+                </a:solidFill>
+                <a:latin typeface="Microsoft JhengHei" pitchFamily="34" charset="0"/>
+                <a:ea typeface="Microsoft JhengHei" pitchFamily="34" charset="-122"/>
+                <a:cs typeface="Microsoft JhengHei" pitchFamily="34" charset="-120"/>
+              </a:rPr>
+              <a:t>※ 資安稽核與修復為平台既有成果,非額外收費項目;VLAN 與 UPS 屬 Phase 1 基礎硬體。</a:t>
+            </a:r>
+            <a:endParaRPr lang="en-US" sz="1000" dirty="0"/>
+          </a:p>
+        </p:txBody>
+      </p:sp>
+      <p:sp>
+        <p:nvSpPr>
+          <p:cNvPr id="38" name="Text 34"/>
+          <p:cNvSpPr/>
+          <p:nvPr/>
+        </p:nvSpPr>
+        <p:spPr>
+          <a:xfrm>
+            <a:off x="548640" y="6510528"/>
+            <a:ext cx="5486400" cy="274320"/>
+          </a:xfrm>
+          <a:prstGeom prst="rect">
+            <a:avLst/>
+          </a:prstGeom>
+          <a:noFill/>
+          <a:ln/>
+        </p:spPr>
+        <p:txBody>
+          <a:bodyPr wrap="square" lIns="0" tIns="0" rIns="0" bIns="0" rtlCol="0" anchor="ctr"/>
+          <a:lstStyle/>
+          <a:p>
+            <a:pPr indent="0" marL="0">
+              <a:buNone/>
+            </a:pPr>
+            <a:r>
+              <a:rPr lang="en-US" sz="1050" dirty="0">
+                <a:solidFill>
+                  <a:srgbClr val="5E74A0"/>
+                </a:solidFill>
+                <a:latin typeface="Microsoft JhengHei" pitchFamily="34" charset="0"/>
+                <a:ea typeface="Microsoft JhengHei" pitchFamily="34" charset="-122"/>
+                <a:cs typeface="Microsoft JhengHei" pitchFamily="34" charset="-120"/>
+              </a:rPr>
+              <a:t>系統方案規劃書 ── 資安與維運保障</a:t>
+            </a:r>
+            <a:endParaRPr lang="en-US" sz="1050" dirty="0"/>
+          </a:p>
+        </p:txBody>
+      </p:sp>
+      <p:sp>
+        <p:nvSpPr>
+          <p:cNvPr id="39" name="Text 35"/>
+          <p:cNvSpPr/>
+          <p:nvPr/>
+        </p:nvSpPr>
+        <p:spPr>
+          <a:xfrm>
+            <a:off x="5486400" y="6510528"/>
+            <a:ext cx="6153912" cy="274320"/>
+          </a:xfrm>
+          <a:prstGeom prst="rect">
+            <a:avLst/>
+          </a:prstGeom>
+          <a:noFill/>
+          <a:ln/>
+        </p:spPr>
+        <p:txBody>
+          <a:bodyPr wrap="square" lIns="0" tIns="0" rIns="0" bIns="0" rtlCol="0" anchor="ctr"/>
+          <a:lstStyle/>
+          <a:p>
+            <a:pPr algn="r" indent="0" marL="0">
+              <a:buNone/>
+            </a:pPr>
+            <a:r>
+              <a:rPr lang="en-US" sz="1050" dirty="0">
+                <a:solidFill>
+                  <a:srgbClr val="5E74A0"/>
+                </a:solidFill>
+                <a:latin typeface="Microsoft JhengHei" pitchFamily="34" charset="0"/>
+                <a:ea typeface="Microsoft JhengHei" pitchFamily="34" charset="-122"/>
+                <a:cs typeface="Microsoft JhengHei" pitchFamily="34" charset="-120"/>
+              </a:rPr>
+              <a:t>安全是平台的一部分,不是附加選項</a:t>
+            </a:r>
+            <a:endParaRPr lang="en-US" sz="1050" dirty="0"/>
+          </a:p>
+        </p:txBody>
+      </p:sp>
+    </p:spTree>
+  </p:cSld>
+  <p:clrMapOvr>
+    <a:masterClrMapping/>
+  </p:clrMapOvr>
+</p:sld>
+</file>
+
+<file path=ppt/slides/slide11.xml><?xml version="1.0" encoding="utf-8"?>
+<p:sld xmlns:a="http://schemas.openxmlformats.org/drawingml/2006/main" xmlns:r="http://schemas.openxmlformats.org/officeDocument/2006/relationships" xmlns:p="http://schemas.openxmlformats.org/presentationml/2006/main">
+  <p:cSld name="Slide 11">
+    <p:bg>
+      <p:bgPr>
+        <a:blipFill dpi="0" rotWithShape="1">
+          <a:blip r:embed="rId1">
+            <a:lum/>
+          </a:blip>
+          <a:srcRect/>
+          <a:stretch>
+            <a:fillRect/>
+          </a:stretch>
+        </a:blipFill>
+        <a:effectLst/>
+      </p:bgPr>
+    </p:bg>
+    <p:spTree>
+      <p:nvGrpSpPr>
+        <p:cNvPr id="1" name=""/>
+        <p:cNvGrpSpPr/>
+        <p:nvPr/>
+      </p:nvGrpSpPr>
+      <p:grpSpPr>
+        <a:xfrm>
+          <a:off x="0" y="0"/>
+          <a:ext cx="0" cy="0"/>
+          <a:chOff x="0" y="0"/>
+          <a:chExt cx="0" cy="0"/>
+        </a:xfrm>
+      </p:grpSpPr>
+      <p:sp>
+        <p:nvSpPr>
+          <p:cNvPr id="2" name="Text 0"/>
+          <p:cNvSpPr/>
+          <p:nvPr/>
+        </p:nvSpPr>
+        <p:spPr>
+          <a:xfrm>
+            <a:off x="548640" y="310896"/>
+            <a:ext cx="8229600" cy="274320"/>
+          </a:xfrm>
+          <a:prstGeom prst="rect">
+            <a:avLst/>
+          </a:prstGeom>
+          <a:noFill/>
+          <a:ln/>
+        </p:spPr>
+        <p:txBody>
+          <a:bodyPr wrap="square" lIns="0" tIns="0" rIns="0" bIns="0" rtlCol="0" anchor="ctr"/>
+          <a:lstStyle/>
+          <a:p>
+            <a:pPr indent="0" marL="0">
+              <a:buNone/>
+            </a:pPr>
+            <a:r>
+              <a:rPr lang="en-US" sz="1100" b="1" spc="300" kern="0" dirty="0">
+                <a:solidFill>
+                  <a:srgbClr val="C9A35A"/>
+                </a:solidFill>
+              </a:rPr>
+              <a:t>FAQ</a:t>
+            </a:r>
+            <a:endParaRPr lang="en-US" sz="1100" dirty="0"/>
+          </a:p>
+        </p:txBody>
+      </p:sp>
+      <p:sp>
+        <p:nvSpPr>
+          <p:cNvPr id="3" name="Text 1"/>
+          <p:cNvSpPr/>
+          <p:nvPr/>
+        </p:nvSpPr>
+        <p:spPr>
+          <a:xfrm>
+            <a:off x="530352" y="530352"/>
+            <a:ext cx="8595360" cy="566928"/>
+          </a:xfrm>
+          <a:prstGeom prst="rect">
+            <a:avLst/>
+          </a:prstGeom>
+          <a:noFill/>
+          <a:ln/>
+        </p:spPr>
+        <p:txBody>
+          <a:bodyPr wrap="square" lIns="0" tIns="0" rIns="0" bIns="0" rtlCol="0" anchor="ctr"/>
+          <a:lstStyle/>
+          <a:p>
+            <a:pPr indent="0" marL="0">
+              <a:buNone/>
+            </a:pPr>
+            <a:r>
+              <a:rPr lang="en-US" sz="2600" b="1" dirty="0">
+                <a:solidFill>
+                  <a:srgbClr val="F6F3EC"/>
+                </a:solidFill>
+                <a:latin typeface="Microsoft JhengHei" pitchFamily="34" charset="0"/>
+                <a:ea typeface="Microsoft JhengHei" pitchFamily="34" charset="-122"/>
+                <a:cs typeface="Microsoft JhengHei" pitchFamily="34" charset="-120"/>
+              </a:rPr>
+              <a:t>常見問題</a:t>
+            </a:r>
+            <a:endParaRPr lang="en-US" sz="2600" dirty="0"/>
+          </a:p>
+        </p:txBody>
+      </p:sp>
+      <p:sp>
+        <p:nvSpPr>
+          <p:cNvPr id="4" name="Text 2"/>
+          <p:cNvSpPr/>
+          <p:nvPr/>
+        </p:nvSpPr>
+        <p:spPr>
+          <a:xfrm>
+            <a:off x="548640" y="1133856"/>
+            <a:ext cx="8778240" cy="329184"/>
+          </a:xfrm>
+          <a:prstGeom prst="rect">
+            <a:avLst/>
+          </a:prstGeom>
+          <a:noFill/>
+          <a:ln/>
+        </p:spPr>
+        <p:txBody>
+          <a:bodyPr wrap="square" lIns="0" tIns="0" rIns="0" bIns="0" rtlCol="0" anchor="ctr"/>
+          <a:lstStyle/>
+          <a:p>
+            <a:pPr indent="0" marL="0">
+              <a:buNone/>
+            </a:pPr>
+            <a:r>
+              <a:rPr lang="en-US" sz="1250" dirty="0">
+                <a:solidFill>
+                  <a:srgbClr val="9FB0CC"/>
+                </a:solidFill>
+                <a:latin typeface="Microsoft JhengHei" pitchFamily="34" charset="0"/>
+                <a:ea typeface="Microsoft JhengHei" pitchFamily="34" charset="-122"/>
+                <a:cs typeface="Microsoft JhengHei" pitchFamily="34" charset="-120"/>
+              </a:rPr>
+              <a:t>建商與管委會最常提出的六個疑問,一次說清楚</a:t>
+            </a:r>
+            <a:endParaRPr lang="en-US" sz="1250" dirty="0"/>
+          </a:p>
+        </p:txBody>
+      </p:sp>
+      <p:sp>
+        <p:nvSpPr>
+          <p:cNvPr id="5" name="Text 3"/>
+          <p:cNvSpPr/>
+          <p:nvPr/>
+        </p:nvSpPr>
+        <p:spPr>
+          <a:xfrm>
+            <a:off x="8595360" y="457200"/>
+            <a:ext cx="3044952" cy="822960"/>
+          </a:xfrm>
+          <a:prstGeom prst="rect">
+            <a:avLst/>
+          </a:prstGeom>
+          <a:noFill/>
+          <a:ln/>
+        </p:spPr>
+        <p:txBody>
+          <a:bodyPr wrap="square" lIns="0" tIns="0" rIns="0" bIns="0" rtlCol="0" anchor="ctr"/>
+          <a:lstStyle/>
+          <a:p>
+            <a:pPr algn="r" indent="0" marL="0">
+              <a:lnSpc>
+                <a:spcPct val="125000"/>
+              </a:lnSpc>
+              <a:buNone/>
+            </a:pPr>
+            <a:r>
+              <a:rPr lang="en-US" sz="1150" dirty="0">
+                <a:solidFill>
+                  <a:srgbClr val="9FB0CC"/>
+                </a:solidFill>
+                <a:latin typeface="Microsoft JhengHei" pitchFamily="34" charset="0"/>
+                <a:ea typeface="Microsoft JhengHei" pitchFamily="34" charset="-122"/>
+                <a:cs typeface="Microsoft JhengHei" pitchFamily="34" charset="-120"/>
+              </a:rPr>
+              <a:t>疑慮先回答
+</a:t>
+            </a:r>
+            <a:pPr algn="r" indent="0" marL="0">
+              <a:lnSpc>
+                <a:spcPct val="125000"/>
+              </a:lnSpc>
+              <a:buNone/>
+            </a:pPr>
+            <a:r>
+              <a:rPr lang="en-US" sz="1200" b="1" dirty="0">
+                <a:solidFill>
+                  <a:srgbClr val="E6CF9A"/>
+                </a:solidFill>
+                <a:latin typeface="Microsoft JhengHei" pitchFamily="34" charset="0"/>
+                <a:ea typeface="Microsoft JhengHei" pitchFamily="34" charset="-122"/>
+                <a:cs typeface="Microsoft JhengHei" pitchFamily="34" charset="-120"/>
+              </a:rPr>
+              <a:t>決策更安心</a:t>
+            </a:r>
+            <a:endParaRPr lang="en-US" sz="1150" dirty="0"/>
+          </a:p>
+        </p:txBody>
+      </p:sp>
+      <p:sp>
+        <p:nvSpPr>
+          <p:cNvPr id="6" name="Shape 4"/>
+          <p:cNvSpPr/>
+          <p:nvPr/>
+        </p:nvSpPr>
+        <p:spPr>
+          <a:xfrm>
+            <a:off x="457200" y="1627632"/>
+            <a:ext cx="3639312" cy="2121408"/>
+          </a:xfrm>
+          <a:prstGeom prst="roundRect">
+            <a:avLst>
+              <a:gd name="adj" fmla="val 4741"/>
+            </a:avLst>
+          </a:prstGeom>
+          <a:solidFill>
+            <a:srgbClr val="12203A">
+              <a:alpha val="80000"/>
+            </a:srgbClr>
+          </a:solidFill>
+          <a:ln w="9525">
+            <a:solidFill>
+              <a:srgbClr val="C9A35A">
+                <a:alpha val="42000"/>
+              </a:srgbClr>
+            </a:solidFill>
+            <a:prstDash val="solid"/>
+          </a:ln>
+          <a:effectLst>
+            <a:outerShdw sx="100000" sy="100000" kx="0" ky="0" algn="bl" rotWithShape="0" blurRad="101600" dist="38100" dir="5400000">
+              <a:srgbClr val="000000">
+                <a:alpha val="30000"/>
+              </a:srgbClr>
+            </a:outerShdw>
+          </a:effectLst>
+        </p:spPr>
+      </p:sp>
+      <p:sp>
+        <p:nvSpPr>
+          <p:cNvPr id="7" name="Text 5"/>
+          <p:cNvSpPr/>
+          <p:nvPr/>
+        </p:nvSpPr>
+        <p:spPr>
+          <a:xfrm>
+            <a:off x="658368" y="1773936"/>
+            <a:ext cx="3236976" cy="548640"/>
+          </a:xfrm>
+          <a:prstGeom prst="rect">
+            <a:avLst/>
+          </a:prstGeom>
+          <a:noFill/>
+          <a:ln/>
+        </p:spPr>
+        <p:txBody>
+          <a:bodyPr wrap="square" lIns="0" tIns="0" rIns="0" bIns="0" rtlCol="0" anchor="ctr"/>
+          <a:lstStyle/>
+          <a:p>
+            <a:pPr indent="0" marL="0">
+              <a:lnSpc>
+                <a:spcPct val="105000"/>
+              </a:lnSpc>
+              <a:buNone/>
+            </a:pPr>
+            <a:r>
+              <a:rPr lang="en-US" sz="1400" b="1" dirty="0">
+                <a:solidFill>
+                  <a:srgbClr val="C9A35A"/>
+                </a:solidFill>
+                <a:latin typeface="Microsoft JhengHei" pitchFamily="34" charset="0"/>
+                <a:ea typeface="Microsoft JhengHei" pitchFamily="34" charset="-122"/>
+                <a:cs typeface="Microsoft JhengHei" pitchFamily="34" charset="-120"/>
+              </a:rPr>
+              <a:t>Q  </a:t>
+            </a:r>
+            <a:pPr indent="0" marL="0">
+              <a:lnSpc>
+                <a:spcPct val="105000"/>
+              </a:lnSpc>
+              <a:buNone/>
+            </a:pPr>
+            <a:r>
+              <a:rPr lang="en-US" sz="1250" b="1" dirty="0">
+                <a:solidFill>
+                  <a:srgbClr val="F6F3EC"/>
+                </a:solidFill>
+                <a:latin typeface="Microsoft JhengHei" pitchFamily="34" charset="0"/>
+                <a:ea typeface="Microsoft JhengHei" pitchFamily="34" charset="-122"/>
+                <a:cs typeface="Microsoft JhengHei" pitchFamily="34" charset="-120"/>
+              </a:rPr>
+              <a:t>外網斷線,社區會癱瘓嗎?</a:t>
+            </a:r>
+            <a:endParaRPr lang="en-US" sz="1400" dirty="0"/>
+          </a:p>
+        </p:txBody>
+      </p:sp>
+      <p:sp>
+        <p:nvSpPr>
+          <p:cNvPr id="8" name="Shape 6"/>
+          <p:cNvSpPr/>
+          <p:nvPr/>
+        </p:nvSpPr>
+        <p:spPr>
+          <a:xfrm>
+            <a:off x="658368" y="2395728"/>
+            <a:ext cx="3236976" cy="0"/>
+          </a:xfrm>
+          <a:prstGeom prst="line">
+            <a:avLst/>
+          </a:prstGeom>
+          <a:noFill/>
+          <a:ln w="6350">
+            <a:solidFill>
+              <a:srgbClr val="C9A35A">
+                <a:alpha val="45000"/>
+              </a:srgbClr>
+            </a:solidFill>
+            <a:prstDash val="dash"/>
+          </a:ln>
+        </p:spPr>
+      </p:sp>
+      <p:sp>
+        <p:nvSpPr>
+          <p:cNvPr id="9" name="Text 7"/>
+          <p:cNvSpPr/>
+          <p:nvPr/>
+        </p:nvSpPr>
+        <p:spPr>
+          <a:xfrm>
+            <a:off x="676656" y="2487168"/>
+            <a:ext cx="3200400" cy="1115568"/>
+          </a:xfrm>
+          <a:prstGeom prst="rect">
+            <a:avLst/>
+          </a:prstGeom>
+          <a:noFill/>
+          <a:ln/>
+        </p:spPr>
+        <p:txBody>
+          <a:bodyPr wrap="square" lIns="0" tIns="0" rIns="0" bIns="0" rtlCol="0" anchor="t"/>
+          <a:lstStyle/>
+          <a:p>
+            <a:pPr indent="0" marL="0">
+              <a:lnSpc>
+                <a:spcPct val="112000"/>
+              </a:lnSpc>
+              <a:buNone/>
+            </a:pPr>
+            <a:r>
+              <a:rPr lang="en-US" sz="1030" dirty="0">
+                <a:solidFill>
+                  <a:srgbClr val="CDD8EC"/>
+                </a:solidFill>
+                <a:latin typeface="Microsoft JhengHei" pitchFamily="34" charset="0"/>
+                <a:ea typeface="Microsoft JhengHei" pitchFamily="34" charset="-122"/>
+                <a:cs typeface="Microsoft JhengHei" pitchFamily="34" charset="-120"/>
+              </a:rPr>
+              <a:t>門禁、柵欄等實體系統具獨立運作能力,平台離線不影響基本進出;機房 UPS 斷電續航,恢復後紀錄自動補同步。</a:t>
+            </a:r>
+            <a:endParaRPr lang="en-US" sz="1030" dirty="0"/>
+          </a:p>
+        </p:txBody>
+      </p:sp>
+      <p:sp>
+        <p:nvSpPr>
+          <p:cNvPr id="10" name="Shape 8"/>
+          <p:cNvSpPr/>
+          <p:nvPr/>
+        </p:nvSpPr>
+        <p:spPr>
+          <a:xfrm>
+            <a:off x="4270248" y="1627632"/>
+            <a:ext cx="3639312" cy="2121408"/>
+          </a:xfrm>
+          <a:prstGeom prst="roundRect">
+            <a:avLst>
+              <a:gd name="adj" fmla="val 4741"/>
+            </a:avLst>
+          </a:prstGeom>
+          <a:solidFill>
+            <a:srgbClr val="12203A">
+              <a:alpha val="80000"/>
+            </a:srgbClr>
+          </a:solidFill>
+          <a:ln w="9525">
+            <a:solidFill>
+              <a:srgbClr val="C9A35A">
+                <a:alpha val="42000"/>
+              </a:srgbClr>
+            </a:solidFill>
+            <a:prstDash val="solid"/>
+          </a:ln>
+          <a:effectLst>
+            <a:outerShdw sx="100000" sy="100000" kx="0" ky="0" algn="bl" rotWithShape="0" blurRad="101600" dist="38100" dir="5400000">
+              <a:srgbClr val="000000">
+                <a:alpha val="30000"/>
+              </a:srgbClr>
+            </a:outerShdw>
+          </a:effectLst>
+        </p:spPr>
+      </p:sp>
+      <p:sp>
+        <p:nvSpPr>
+          <p:cNvPr id="11" name="Text 9"/>
+          <p:cNvSpPr/>
+          <p:nvPr/>
+        </p:nvSpPr>
+        <p:spPr>
+          <a:xfrm>
+            <a:off x="4471416" y="1773936"/>
+            <a:ext cx="3236976" cy="548640"/>
+          </a:xfrm>
+          <a:prstGeom prst="rect">
+            <a:avLst/>
+          </a:prstGeom>
+          <a:noFill/>
+          <a:ln/>
+        </p:spPr>
+        <p:txBody>
+          <a:bodyPr wrap="square" lIns="0" tIns="0" rIns="0" bIns="0" rtlCol="0" anchor="ctr"/>
+          <a:lstStyle/>
+          <a:p>
+            <a:pPr indent="0" marL="0">
+              <a:lnSpc>
+                <a:spcPct val="105000"/>
+              </a:lnSpc>
+              <a:buNone/>
+            </a:pPr>
+            <a:r>
+              <a:rPr lang="en-US" sz="1400" b="1" dirty="0">
+                <a:solidFill>
+                  <a:srgbClr val="C9A35A"/>
+                </a:solidFill>
+                <a:latin typeface="Microsoft JhengHei" pitchFamily="34" charset="0"/>
+                <a:ea typeface="Microsoft JhengHei" pitchFamily="34" charset="-122"/>
+                <a:cs typeface="Microsoft JhengHei" pitchFamily="34" charset="-120"/>
+              </a:rPr>
+              <a:t>Q  </a:t>
+            </a:r>
+            <a:pPr indent="0" marL="0">
+              <a:lnSpc>
+                <a:spcPct val="105000"/>
+              </a:lnSpc>
+              <a:buNone/>
+            </a:pPr>
+            <a:r>
+              <a:rPr lang="en-US" sz="1250" b="1" dirty="0">
+                <a:solidFill>
+                  <a:srgbClr val="F6F3EC"/>
+                </a:solidFill>
+                <a:latin typeface="Microsoft JhengHei" pitchFamily="34" charset="0"/>
+                <a:ea typeface="Microsoft JhengHei" pitchFamily="34" charset="-122"/>
+                <a:cs typeface="Microsoft JhengHei" pitchFamily="34" charset="-120"/>
+              </a:rPr>
+              <a:t>資料是誰的?</a:t>
+            </a:r>
+            <a:endParaRPr lang="en-US" sz="1400" dirty="0"/>
+          </a:p>
+        </p:txBody>
+      </p:sp>
+      <p:sp>
+        <p:nvSpPr>
+          <p:cNvPr id="12" name="Shape 10"/>
+          <p:cNvSpPr/>
+          <p:nvPr/>
+        </p:nvSpPr>
+        <p:spPr>
+          <a:xfrm>
+            <a:off x="4471416" y="2395728"/>
+            <a:ext cx="3236976" cy="0"/>
+          </a:xfrm>
+          <a:prstGeom prst="line">
+            <a:avLst/>
+          </a:prstGeom>
+          <a:noFill/>
+          <a:ln w="6350">
+            <a:solidFill>
+              <a:srgbClr val="C9A35A">
+                <a:alpha val="45000"/>
+              </a:srgbClr>
+            </a:solidFill>
+            <a:prstDash val="dash"/>
+          </a:ln>
+        </p:spPr>
+      </p:sp>
+      <p:sp>
+        <p:nvSpPr>
+          <p:cNvPr id="13" name="Text 11"/>
+          <p:cNvSpPr/>
+          <p:nvPr/>
+        </p:nvSpPr>
+        <p:spPr>
+          <a:xfrm>
+            <a:off x="4489704" y="2487168"/>
+            <a:ext cx="3200400" cy="1115568"/>
+          </a:xfrm>
+          <a:prstGeom prst="rect">
+            <a:avLst/>
+          </a:prstGeom>
+          <a:noFill/>
+          <a:ln/>
+        </p:spPr>
+        <p:txBody>
+          <a:bodyPr wrap="square" lIns="0" tIns="0" rIns="0" bIns="0" rtlCol="0" anchor="t"/>
+          <a:lstStyle/>
+          <a:p>
+            <a:pPr indent="0" marL="0">
+              <a:lnSpc>
+                <a:spcPct val="112000"/>
+              </a:lnSpc>
+              <a:buNone/>
+            </a:pPr>
+            <a:r>
+              <a:rPr lang="en-US" sz="1030" dirty="0">
+                <a:solidFill>
+                  <a:srgbClr val="CDD8EC"/>
+                </a:solidFill>
+                <a:latin typeface="Microsoft JhengHei" pitchFamily="34" charset="0"/>
+                <a:ea typeface="Microsoft JhengHei" pitchFamily="34" charset="-122"/>
+                <a:cs typeface="Microsoft JhengHei" pitchFamily="34" charset="-120"/>
+              </a:rPr>
+              <a:t>資料歸屬建案/管委會。Phase 3 可自架語意服務與 PostgreSQL,資料與 AI 完全落地自主,不依賴外部供應商。</a:t>
+            </a:r>
+            <a:endParaRPr lang="en-US" sz="1030" dirty="0"/>
+          </a:p>
+        </p:txBody>
+      </p:sp>
+      <p:sp>
+        <p:nvSpPr>
+          <p:cNvPr id="14" name="Shape 12"/>
+          <p:cNvSpPr/>
+          <p:nvPr/>
+        </p:nvSpPr>
+        <p:spPr>
+          <a:xfrm>
+            <a:off x="8083296" y="1627632"/>
+            <a:ext cx="3639312" cy="2121408"/>
+          </a:xfrm>
+          <a:prstGeom prst="roundRect">
+            <a:avLst>
+              <a:gd name="adj" fmla="val 4741"/>
+            </a:avLst>
+          </a:prstGeom>
+          <a:solidFill>
+            <a:srgbClr val="12203A">
+              <a:alpha val="80000"/>
+            </a:srgbClr>
+          </a:solidFill>
+          <a:ln w="9525">
+            <a:solidFill>
+              <a:srgbClr val="C9A35A">
+                <a:alpha val="42000"/>
+              </a:srgbClr>
+            </a:solidFill>
+            <a:prstDash val="solid"/>
+          </a:ln>
+          <a:effectLst>
+            <a:outerShdw sx="100000" sy="100000" kx="0" ky="0" algn="bl" rotWithShape="0" blurRad="101600" dist="38100" dir="5400000">
+              <a:srgbClr val="000000">
+                <a:alpha val="30000"/>
+              </a:srgbClr>
+            </a:outerShdw>
+          </a:effectLst>
+        </p:spPr>
+      </p:sp>
+      <p:sp>
+        <p:nvSpPr>
+          <p:cNvPr id="15" name="Text 13"/>
+          <p:cNvSpPr/>
+          <p:nvPr/>
+        </p:nvSpPr>
+        <p:spPr>
+          <a:xfrm>
+            <a:off x="8284464" y="1773936"/>
+            <a:ext cx="3236976" cy="548640"/>
+          </a:xfrm>
+          <a:prstGeom prst="rect">
+            <a:avLst/>
+          </a:prstGeom>
+          <a:noFill/>
+          <a:ln/>
+        </p:spPr>
+        <p:txBody>
+          <a:bodyPr wrap="square" lIns="0" tIns="0" rIns="0" bIns="0" rtlCol="0" anchor="ctr"/>
+          <a:lstStyle/>
+          <a:p>
+            <a:pPr indent="0" marL="0">
+              <a:lnSpc>
+                <a:spcPct val="105000"/>
+              </a:lnSpc>
+              <a:buNone/>
+            </a:pPr>
+            <a:r>
+              <a:rPr lang="en-US" sz="1400" b="1" dirty="0">
+                <a:solidFill>
+                  <a:srgbClr val="C9A35A"/>
+                </a:solidFill>
+                <a:latin typeface="Microsoft JhengHei" pitchFamily="34" charset="0"/>
+                <a:ea typeface="Microsoft JhengHei" pitchFamily="34" charset="-122"/>
+                <a:cs typeface="Microsoft JhengHei" pitchFamily="34" charset="-120"/>
+              </a:rPr>
+              <a:t>Q  </a:t>
+            </a:r>
+            <a:pPr indent="0" marL="0">
+              <a:lnSpc>
+                <a:spcPct val="105000"/>
+              </a:lnSpc>
+              <a:buNone/>
+            </a:pPr>
+            <a:r>
+              <a:rPr lang="en-US" sz="1250" b="1" dirty="0">
+                <a:solidFill>
+                  <a:srgbClr val="F6F3EC"/>
+                </a:solidFill>
+                <a:latin typeface="Microsoft JhengHei" pitchFamily="34" charset="0"/>
+                <a:ea typeface="Microsoft JhengHei" pitchFamily="34" charset="-122"/>
+                <a:cs typeface="Microsoft JhengHei" pitchFamily="34" charset="-120"/>
+              </a:rPr>
+              <a:t>換物業公司怎麼辦?</a:t>
+            </a:r>
+            <a:endParaRPr lang="en-US" sz="1400" dirty="0"/>
+          </a:p>
+        </p:txBody>
+      </p:sp>
+      <p:sp>
+        <p:nvSpPr>
+          <p:cNvPr id="16" name="Shape 14"/>
+          <p:cNvSpPr/>
+          <p:nvPr/>
+        </p:nvSpPr>
+        <p:spPr>
+          <a:xfrm>
+            <a:off x="8284464" y="2395728"/>
+            <a:ext cx="3236976" cy="0"/>
+          </a:xfrm>
+          <a:prstGeom prst="line">
+            <a:avLst/>
+          </a:prstGeom>
+          <a:noFill/>
+          <a:ln w="6350">
+            <a:solidFill>
+              <a:srgbClr val="C9A35A">
+                <a:alpha val="45000"/>
+              </a:srgbClr>
+            </a:solidFill>
+            <a:prstDash val="dash"/>
+          </a:ln>
+        </p:spPr>
+      </p:sp>
+      <p:sp>
+        <p:nvSpPr>
+          <p:cNvPr id="17" name="Text 15"/>
+          <p:cNvSpPr/>
+          <p:nvPr/>
+        </p:nvSpPr>
+        <p:spPr>
+          <a:xfrm>
+            <a:off x="8302752" y="2487168"/>
+            <a:ext cx="3200400" cy="1115568"/>
+          </a:xfrm>
+          <a:prstGeom prst="rect">
+            <a:avLst/>
+          </a:prstGeom>
+          <a:noFill/>
+          <a:ln/>
+        </p:spPr>
+        <p:txBody>
+          <a:bodyPr wrap="square" lIns="0" tIns="0" rIns="0" bIns="0" rtlCol="0" anchor="t"/>
+          <a:lstStyle/>
+          <a:p>
+            <a:pPr indent="0" marL="0">
+              <a:lnSpc>
+                <a:spcPct val="112000"/>
+              </a:lnSpc>
+              <a:buNone/>
+            </a:pPr>
+            <a:r>
+              <a:rPr lang="en-US" sz="1030" dirty="0">
+                <a:solidFill>
+                  <a:srgbClr val="CDD8EC"/>
+                </a:solidFill>
+                <a:latin typeface="Microsoft JhengHei" pitchFamily="34" charset="0"/>
+                <a:ea typeface="Microsoft JhengHei" pitchFamily="34" charset="-122"/>
+                <a:cs typeface="Microsoft JhengHei" pitchFamily="34" charset="-120"/>
+              </a:rPr>
+              <a:t>平台角色權限分級,移交即帳號交接 —— 住戶資料、帳務、工單流程完整留存於平台,營運不中斷。</a:t>
+            </a:r>
+            <a:endParaRPr lang="en-US" sz="1030" dirty="0"/>
+          </a:p>
+        </p:txBody>
+      </p:sp>
+      <p:sp>
+        <p:nvSpPr>
+          <p:cNvPr id="18" name="Shape 16"/>
+          <p:cNvSpPr/>
+          <p:nvPr/>
+        </p:nvSpPr>
+        <p:spPr>
+          <a:xfrm>
+            <a:off x="457200" y="3913632"/>
+            <a:ext cx="3639312" cy="2121408"/>
+          </a:xfrm>
+          <a:prstGeom prst="roundRect">
+            <a:avLst>
+              <a:gd name="adj" fmla="val 4741"/>
+            </a:avLst>
+          </a:prstGeom>
+          <a:solidFill>
+            <a:srgbClr val="12203A">
+              <a:alpha val="80000"/>
+            </a:srgbClr>
+          </a:solidFill>
+          <a:ln w="9525">
+            <a:solidFill>
+              <a:srgbClr val="C9A35A">
+                <a:alpha val="42000"/>
+              </a:srgbClr>
+            </a:solidFill>
+            <a:prstDash val="solid"/>
+          </a:ln>
+          <a:effectLst>
+            <a:outerShdw sx="100000" sy="100000" kx="0" ky="0" algn="bl" rotWithShape="0" blurRad="101600" dist="38100" dir="5400000">
+              <a:srgbClr val="000000">
+                <a:alpha val="30000"/>
+              </a:srgbClr>
+            </a:outerShdw>
+          </a:effectLst>
+        </p:spPr>
+      </p:sp>
+      <p:sp>
+        <p:nvSpPr>
+          <p:cNvPr id="19" name="Text 17"/>
+          <p:cNvSpPr/>
+          <p:nvPr/>
+        </p:nvSpPr>
+        <p:spPr>
+          <a:xfrm>
+            <a:off x="658368" y="4059936"/>
+            <a:ext cx="3236976" cy="548640"/>
+          </a:xfrm>
+          <a:prstGeom prst="rect">
+            <a:avLst/>
+          </a:prstGeom>
+          <a:noFill/>
+          <a:ln/>
+        </p:spPr>
+        <p:txBody>
+          <a:bodyPr wrap="square" lIns="0" tIns="0" rIns="0" bIns="0" rtlCol="0" anchor="ctr"/>
+          <a:lstStyle/>
+          <a:p>
+            <a:pPr indent="0" marL="0">
+              <a:lnSpc>
+                <a:spcPct val="105000"/>
+              </a:lnSpc>
+              <a:buNone/>
+            </a:pPr>
+            <a:r>
+              <a:rPr lang="en-US" sz="1400" b="1" dirty="0">
+                <a:solidFill>
+                  <a:srgbClr val="C9A35A"/>
+                </a:solidFill>
+                <a:latin typeface="Microsoft JhengHei" pitchFamily="34" charset="0"/>
+                <a:ea typeface="Microsoft JhengHei" pitchFamily="34" charset="-122"/>
+                <a:cs typeface="Microsoft JhengHei" pitchFamily="34" charset="-120"/>
+              </a:rPr>
+              <a:t>Q  </a:t>
+            </a:r>
+            <a:pPr indent="0" marL="0">
+              <a:lnSpc>
+                <a:spcPct val="105000"/>
+              </a:lnSpc>
+              <a:buNone/>
+            </a:pPr>
+            <a:r>
+              <a:rPr lang="en-US" sz="1250" b="1" dirty="0">
+                <a:solidFill>
+                  <a:srgbClr val="F6F3EC"/>
+                </a:solidFill>
+                <a:latin typeface="Microsoft JhengHei" pitchFamily="34" charset="0"/>
+                <a:ea typeface="Microsoft JhengHei" pitchFamily="34" charset="-122"/>
+                <a:cs typeface="Microsoft JhengHei" pitchFamily="34" charset="-120"/>
+              </a:rPr>
+              <a:t>會被特定硬體廠牌綁死嗎?</a:t>
+            </a:r>
+            <a:endParaRPr lang="en-US" sz="1400" dirty="0"/>
+          </a:p>
+        </p:txBody>
+      </p:sp>
+      <p:sp>
+        <p:nvSpPr>
+          <p:cNvPr id="20" name="Shape 18"/>
+          <p:cNvSpPr/>
+          <p:nvPr/>
+        </p:nvSpPr>
+        <p:spPr>
+          <a:xfrm>
+            <a:off x="658368" y="4681728"/>
+            <a:ext cx="3236976" cy="0"/>
+          </a:xfrm>
+          <a:prstGeom prst="line">
+            <a:avLst/>
+          </a:prstGeom>
+          <a:noFill/>
+          <a:ln w="6350">
+            <a:solidFill>
+              <a:srgbClr val="C9A35A">
+                <a:alpha val="45000"/>
+              </a:srgbClr>
+            </a:solidFill>
+            <a:prstDash val="dash"/>
+          </a:ln>
+        </p:spPr>
+      </p:sp>
+      <p:sp>
+        <p:nvSpPr>
+          <p:cNvPr id="21" name="Text 19"/>
+          <p:cNvSpPr/>
+          <p:nvPr/>
+        </p:nvSpPr>
+        <p:spPr>
+          <a:xfrm>
+            <a:off x="676656" y="4773168"/>
+            <a:ext cx="3200400" cy="1115568"/>
+          </a:xfrm>
+          <a:prstGeom prst="rect">
+            <a:avLst/>
+          </a:prstGeom>
+          <a:noFill/>
+          <a:ln/>
+        </p:spPr>
+        <p:txBody>
+          <a:bodyPr wrap="square" lIns="0" tIns="0" rIns="0" bIns="0" rtlCol="0" anchor="t"/>
+          <a:lstStyle/>
+          <a:p>
+            <a:pPr indent="0" marL="0">
+              <a:lnSpc>
+                <a:spcPct val="112000"/>
+              </a:lnSpc>
+              <a:buNone/>
+            </a:pPr>
+            <a:r>
+              <a:rPr lang="en-US" sz="1030" dirty="0">
+                <a:solidFill>
+                  <a:srgbClr val="CDD8EC"/>
+                </a:solidFill>
+                <a:latin typeface="Microsoft JhengHei" pitchFamily="34" charset="0"/>
+                <a:ea typeface="Microsoft JhengHei" pitchFamily="34" charset="-122"/>
+                <a:cs typeface="Microsoft JhengHei" pitchFamily="34" charset="-120"/>
+              </a:rPr>
+              <a:t>分層解耦架構:設備經標準協定(HTTP/MQTT/Modbus)接入閘道,單一設備可獨立替換,不牽動整套系統。</a:t>
+            </a:r>
+            <a:endParaRPr lang="en-US" sz="1030" dirty="0"/>
+          </a:p>
+        </p:txBody>
+      </p:sp>
+      <p:sp>
+        <p:nvSpPr>
+          <p:cNvPr id="22" name="Shape 20"/>
+          <p:cNvSpPr/>
+          <p:nvPr/>
+        </p:nvSpPr>
+        <p:spPr>
+          <a:xfrm>
+            <a:off x="4270248" y="3913632"/>
+            <a:ext cx="3639312" cy="2121408"/>
+          </a:xfrm>
+          <a:prstGeom prst="roundRect">
+            <a:avLst>
+              <a:gd name="adj" fmla="val 4741"/>
+            </a:avLst>
+          </a:prstGeom>
+          <a:solidFill>
+            <a:srgbClr val="12203A">
+              <a:alpha val="80000"/>
+            </a:srgbClr>
+          </a:solidFill>
+          <a:ln w="9525">
+            <a:solidFill>
+              <a:srgbClr val="C9A35A">
+                <a:alpha val="42000"/>
+              </a:srgbClr>
+            </a:solidFill>
+            <a:prstDash val="solid"/>
+          </a:ln>
+          <a:effectLst>
+            <a:outerShdw sx="100000" sy="100000" kx="0" ky="0" algn="bl" rotWithShape="0" blurRad="101600" dist="38100" dir="5400000">
+              <a:srgbClr val="000000">
+                <a:alpha val="30000"/>
+              </a:srgbClr>
+            </a:outerShdw>
+          </a:effectLst>
+        </p:spPr>
+      </p:sp>
+      <p:sp>
+        <p:nvSpPr>
+          <p:cNvPr id="23" name="Text 21"/>
+          <p:cNvSpPr/>
+          <p:nvPr/>
+        </p:nvSpPr>
+        <p:spPr>
+          <a:xfrm>
+            <a:off x="4471416" y="4059936"/>
+            <a:ext cx="3236976" cy="548640"/>
+          </a:xfrm>
+          <a:prstGeom prst="rect">
+            <a:avLst/>
+          </a:prstGeom>
+          <a:noFill/>
+          <a:ln/>
+        </p:spPr>
+        <p:txBody>
+          <a:bodyPr wrap="square" lIns="0" tIns="0" rIns="0" bIns="0" rtlCol="0" anchor="ctr"/>
+          <a:lstStyle/>
+          <a:p>
+            <a:pPr indent="0" marL="0">
+              <a:lnSpc>
+                <a:spcPct val="105000"/>
+              </a:lnSpc>
+              <a:buNone/>
+            </a:pPr>
+            <a:r>
+              <a:rPr lang="en-US" sz="1400" b="1" dirty="0">
+                <a:solidFill>
+                  <a:srgbClr val="C9A35A"/>
+                </a:solidFill>
+                <a:latin typeface="Microsoft JhengHei" pitchFamily="34" charset="0"/>
+                <a:ea typeface="Microsoft JhengHei" pitchFamily="34" charset="-122"/>
+                <a:cs typeface="Microsoft JhengHei" pitchFamily="34" charset="-120"/>
+              </a:rPr>
+              <a:t>Q  </a:t>
+            </a:r>
+            <a:pPr indent="0" marL="0">
+              <a:lnSpc>
+                <a:spcPct val="105000"/>
+              </a:lnSpc>
+              <a:buNone/>
+            </a:pPr>
+            <a:r>
+              <a:rPr lang="en-US" sz="1250" b="1" dirty="0">
+                <a:solidFill>
+                  <a:srgbClr val="F6F3EC"/>
+                </a:solidFill>
+                <a:latin typeface="Microsoft JhengHei" pitchFamily="34" charset="0"/>
+                <a:ea typeface="Microsoft JhengHei" pitchFamily="34" charset="-122"/>
+                <a:cs typeface="Microsoft JhengHei" pitchFamily="34" charset="-120"/>
+              </a:rPr>
+              <a:t>住戶不會用怎麼辦?</a:t>
+            </a:r>
+            <a:endParaRPr lang="en-US" sz="1400" dirty="0"/>
+          </a:p>
+        </p:txBody>
+      </p:sp>
+      <p:sp>
+        <p:nvSpPr>
+          <p:cNvPr id="24" name="Shape 22"/>
+          <p:cNvSpPr/>
+          <p:nvPr/>
+        </p:nvSpPr>
+        <p:spPr>
+          <a:xfrm>
+            <a:off x="4471416" y="4681728"/>
+            <a:ext cx="3236976" cy="0"/>
+          </a:xfrm>
+          <a:prstGeom prst="line">
+            <a:avLst/>
+          </a:prstGeom>
+          <a:noFill/>
+          <a:ln w="6350">
+            <a:solidFill>
+              <a:srgbClr val="C9A35A">
+                <a:alpha val="45000"/>
+              </a:srgbClr>
+            </a:solidFill>
+            <a:prstDash val="dash"/>
+          </a:ln>
+        </p:spPr>
+      </p:sp>
+      <p:sp>
+        <p:nvSpPr>
+          <p:cNvPr id="25" name="Text 23"/>
+          <p:cNvSpPr/>
+          <p:nvPr/>
+        </p:nvSpPr>
+        <p:spPr>
+          <a:xfrm>
+            <a:off x="4489704" y="4773168"/>
+            <a:ext cx="3200400" cy="1115568"/>
+          </a:xfrm>
+          <a:prstGeom prst="rect">
+            <a:avLst/>
+          </a:prstGeom>
+          <a:noFill/>
+          <a:ln/>
+        </p:spPr>
+        <p:txBody>
+          <a:bodyPr wrap="square" lIns="0" tIns="0" rIns="0" bIns="0" rtlCol="0" anchor="t"/>
+          <a:lstStyle/>
+          <a:p>
+            <a:pPr indent="0" marL="0">
+              <a:lnSpc>
+                <a:spcPct val="112000"/>
+              </a:lnSpc>
+              <a:buNone/>
+            </a:pPr>
+            <a:r>
+              <a:rPr lang="en-US" sz="1030" dirty="0">
+                <a:solidFill>
+                  <a:srgbClr val="CDD8EC"/>
+                </a:solidFill>
+                <a:latin typeface="Microsoft JhengHei" pitchFamily="34" charset="0"/>
+                <a:ea typeface="Microsoft JhengHei" pitchFamily="34" charset="-122"/>
+                <a:cs typeface="Microsoft JhengHei" pitchFamily="34" charset="-120"/>
+              </a:rPr>
+              <a:t>LINE 免安裝即可綁定、接收通知與客服;App 承載進階功能,雙軌並行。導入期由平台方支援住戶教育訓練。</a:t>
+            </a:r>
+            <a:endParaRPr lang="en-US" sz="1030" dirty="0"/>
+          </a:p>
+        </p:txBody>
+      </p:sp>
+      <p:sp>
+        <p:nvSpPr>
+          <p:cNvPr id="26" name="Shape 24"/>
+          <p:cNvSpPr/>
+          <p:nvPr/>
+        </p:nvSpPr>
+        <p:spPr>
+          <a:xfrm>
+            <a:off x="8083296" y="3913632"/>
+            <a:ext cx="3639312" cy="2121408"/>
+          </a:xfrm>
+          <a:prstGeom prst="roundRect">
+            <a:avLst>
+              <a:gd name="adj" fmla="val 4741"/>
+            </a:avLst>
+          </a:prstGeom>
+          <a:solidFill>
+            <a:srgbClr val="12203A">
+              <a:alpha val="80000"/>
+            </a:srgbClr>
+          </a:solidFill>
+          <a:ln w="9525">
+            <a:solidFill>
+              <a:srgbClr val="C9A35A">
+                <a:alpha val="42000"/>
+              </a:srgbClr>
+            </a:solidFill>
+            <a:prstDash val="solid"/>
+          </a:ln>
+          <a:effectLst>
+            <a:outerShdw sx="100000" sy="100000" kx="0" ky="0" algn="bl" rotWithShape="0" blurRad="101600" dist="38100" dir="5400000">
+              <a:srgbClr val="000000">
+                <a:alpha val="30000"/>
+              </a:srgbClr>
+            </a:outerShdw>
+          </a:effectLst>
+        </p:spPr>
+      </p:sp>
+      <p:sp>
+        <p:nvSpPr>
+          <p:cNvPr id="27" name="Text 25"/>
+          <p:cNvSpPr/>
+          <p:nvPr/>
+        </p:nvSpPr>
+        <p:spPr>
+          <a:xfrm>
+            <a:off x="8284464" y="4059936"/>
+            <a:ext cx="3236976" cy="548640"/>
+          </a:xfrm>
+          <a:prstGeom prst="rect">
+            <a:avLst/>
+          </a:prstGeom>
+          <a:noFill/>
+          <a:ln/>
+        </p:spPr>
+        <p:txBody>
+          <a:bodyPr wrap="square" lIns="0" tIns="0" rIns="0" bIns="0" rtlCol="0" anchor="ctr"/>
+          <a:lstStyle/>
+          <a:p>
+            <a:pPr indent="0" marL="0">
+              <a:lnSpc>
+                <a:spcPct val="105000"/>
+              </a:lnSpc>
+              <a:buNone/>
+            </a:pPr>
+            <a:r>
+              <a:rPr lang="en-US" sz="1400" b="1" dirty="0">
+                <a:solidFill>
+                  <a:srgbClr val="C9A35A"/>
+                </a:solidFill>
+                <a:latin typeface="Microsoft JhengHei" pitchFamily="34" charset="0"/>
+                <a:ea typeface="Microsoft JhengHei" pitchFamily="34" charset="-122"/>
+                <a:cs typeface="Microsoft JhengHei" pitchFamily="34" charset="-120"/>
+              </a:rPr>
+              <a:t>Q  </a:t>
+            </a:r>
+            <a:pPr indent="0" marL="0">
+              <a:lnSpc>
+                <a:spcPct val="105000"/>
+              </a:lnSpc>
+              <a:buNone/>
+            </a:pPr>
+            <a:r>
+              <a:rPr lang="en-US" sz="1250" b="1" dirty="0">
+                <a:solidFill>
+                  <a:srgbClr val="F6F3EC"/>
+                </a:solidFill>
+                <a:latin typeface="Microsoft JhengHei" pitchFamily="34" charset="0"/>
+                <a:ea typeface="Microsoft JhengHei" pitchFamily="34" charset="-122"/>
+                <a:cs typeface="Microsoft JhengHei" pitchFamily="34" charset="-120"/>
+              </a:rPr>
+              <a:t>後續維護費用怎麼算?</a:t>
+            </a:r>
+            <a:endParaRPr lang="en-US" sz="1400" dirty="0"/>
+          </a:p>
+        </p:txBody>
+      </p:sp>
+      <p:sp>
+        <p:nvSpPr>
+          <p:cNvPr id="28" name="Shape 26"/>
+          <p:cNvSpPr/>
+          <p:nvPr/>
+        </p:nvSpPr>
+        <p:spPr>
+          <a:xfrm>
+            <a:off x="8284464" y="4681728"/>
+            <a:ext cx="3236976" cy="0"/>
+          </a:xfrm>
+          <a:prstGeom prst="line">
+            <a:avLst/>
+          </a:prstGeom>
+          <a:noFill/>
+          <a:ln w="6350">
+            <a:solidFill>
+              <a:srgbClr val="C9A35A">
+                <a:alpha val="45000"/>
+              </a:srgbClr>
+            </a:solidFill>
+            <a:prstDash val="dash"/>
+          </a:ln>
+        </p:spPr>
+      </p:sp>
+      <p:sp>
+        <p:nvSpPr>
+          <p:cNvPr id="29" name="Text 27"/>
+          <p:cNvSpPr/>
+          <p:nvPr/>
+        </p:nvSpPr>
+        <p:spPr>
+          <a:xfrm>
+            <a:off x="8302752" y="4773168"/>
+            <a:ext cx="3200400" cy="1115568"/>
+          </a:xfrm>
+          <a:prstGeom prst="rect">
+            <a:avLst/>
+          </a:prstGeom>
+          <a:noFill/>
+          <a:ln/>
+        </p:spPr>
+        <p:txBody>
+          <a:bodyPr wrap="square" lIns="0" tIns="0" rIns="0" bIns="0" rtlCol="0" anchor="t"/>
+          <a:lstStyle/>
+          <a:p>
+            <a:pPr indent="0" marL="0">
+              <a:lnSpc>
+                <a:spcPct val="112000"/>
+              </a:lnSpc>
+              <a:buNone/>
+            </a:pPr>
+            <a:r>
+              <a:rPr lang="en-US" sz="1030" dirty="0">
+                <a:solidFill>
+                  <a:srgbClr val="CDD8EC"/>
+                </a:solidFill>
+                <a:latin typeface="Microsoft JhengHei" pitchFamily="34" charset="0"/>
+                <a:ea typeface="Microsoft JhengHei" pitchFamily="34" charset="-122"/>
+                <a:cs typeface="Microsoft JhengHei" pitchFamily="34" charset="-120"/>
+              </a:rPr>
+              <a:t>雲端資源按階段升級、硬體分批投入,避免一次性重投資;維運與授權模式於報價單另行詳列。</a:t>
+            </a:r>
+            <a:endParaRPr lang="en-US" sz="1030" dirty="0"/>
+          </a:p>
+        </p:txBody>
+      </p:sp>
+      <p:sp>
+        <p:nvSpPr>
+          <p:cNvPr id="30" name="Text 28"/>
+          <p:cNvSpPr/>
+          <p:nvPr/>
+        </p:nvSpPr>
+        <p:spPr>
+          <a:xfrm>
+            <a:off x="457200" y="6126480"/>
+            <a:ext cx="11274552" cy="274320"/>
+          </a:xfrm>
+          <a:prstGeom prst="rect">
+            <a:avLst/>
+          </a:prstGeom>
+          <a:noFill/>
+          <a:ln/>
+        </p:spPr>
+        <p:txBody>
+          <a:bodyPr wrap="square" lIns="0" tIns="0" rIns="0" bIns="0" rtlCol="0" anchor="ctr"/>
+          <a:lstStyle/>
+          <a:p>
+            <a:pPr indent="0" marL="0">
+              <a:buNone/>
+            </a:pPr>
+            <a:r>
+              <a:rPr lang="en-US" sz="1000" i="1" dirty="0">
+                <a:solidFill>
+                  <a:srgbClr val="5E74A0"/>
+                </a:solidFill>
+                <a:latin typeface="Microsoft JhengHei" pitchFamily="34" charset="0"/>
+                <a:ea typeface="Microsoft JhengHei" pitchFamily="34" charset="-122"/>
+                <a:cs typeface="Microsoft JhengHei" pitchFamily="34" charset="-120"/>
+              </a:rPr>
+              <a:t>※ 其他技術與商務問題,歡迎於需求盤點會議提出 —— 我們以實際系統現況回答,不做誇大承諾。</a:t>
+            </a:r>
+            <a:endParaRPr lang="en-US" sz="1000" dirty="0"/>
+          </a:p>
+        </p:txBody>
+      </p:sp>
+      <p:sp>
+        <p:nvSpPr>
+          <p:cNvPr id="31" name="Text 29"/>
+          <p:cNvSpPr/>
+          <p:nvPr/>
+        </p:nvSpPr>
+        <p:spPr>
+          <a:xfrm>
+            <a:off x="548640" y="6510528"/>
+            <a:ext cx="5486400" cy="274320"/>
+          </a:xfrm>
+          <a:prstGeom prst="rect">
+            <a:avLst/>
+          </a:prstGeom>
+          <a:noFill/>
+          <a:ln/>
+        </p:spPr>
+        <p:txBody>
+          <a:bodyPr wrap="square" lIns="0" tIns="0" rIns="0" bIns="0" rtlCol="0" anchor="ctr"/>
+          <a:lstStyle/>
+          <a:p>
+            <a:pPr indent="0" marL="0">
+              <a:buNone/>
+            </a:pPr>
+            <a:r>
+              <a:rPr lang="en-US" sz="1050" dirty="0">
+                <a:solidFill>
+                  <a:srgbClr val="5E74A0"/>
+                </a:solidFill>
+                <a:latin typeface="Microsoft JhengHei" pitchFamily="34" charset="0"/>
+                <a:ea typeface="Microsoft JhengHei" pitchFamily="34" charset="-122"/>
+                <a:cs typeface="Microsoft JhengHei" pitchFamily="34" charset="-120"/>
+              </a:rPr>
+              <a:t>系統方案規劃書 ── 常見問題</a:t>
+            </a:r>
+            <a:endParaRPr lang="en-US" sz="1050" dirty="0"/>
+          </a:p>
+        </p:txBody>
+      </p:sp>
+      <p:sp>
+        <p:nvSpPr>
+          <p:cNvPr id="32" name="Text 30"/>
+          <p:cNvSpPr/>
+          <p:nvPr/>
+        </p:nvSpPr>
+        <p:spPr>
+          <a:xfrm>
+            <a:off x="5486400" y="6510528"/>
+            <a:ext cx="6153912" cy="274320"/>
+          </a:xfrm>
+          <a:prstGeom prst="rect">
+            <a:avLst/>
+          </a:prstGeom>
+          <a:noFill/>
+          <a:ln/>
+        </p:spPr>
+        <p:txBody>
+          <a:bodyPr wrap="square" lIns="0" tIns="0" rIns="0" bIns="0" rtlCol="0" anchor="ctr"/>
+          <a:lstStyle/>
+          <a:p>
+            <a:pPr algn="r" indent="0" marL="0">
+              <a:buNone/>
+            </a:pPr>
+            <a:r>
+              <a:rPr lang="en-US" sz="1050" dirty="0">
+                <a:solidFill>
+                  <a:srgbClr val="5E74A0"/>
+                </a:solidFill>
+                <a:latin typeface="Microsoft JhengHei" pitchFamily="34" charset="0"/>
+                <a:ea typeface="Microsoft JhengHei" pitchFamily="34" charset="-122"/>
+                <a:cs typeface="Microsoft JhengHei" pitchFamily="34" charset="-120"/>
+              </a:rPr>
+              <a:t>疑慮先回答 · 決策更安心</a:t>
+            </a:r>
+            <a:endParaRPr lang="en-US" sz="1050" dirty="0"/>
+          </a:p>
+        </p:txBody>
+      </p:sp>
+    </p:spTree>
+  </p:cSld>
+  <p:clrMapOvr>
+    <a:masterClrMapping/>
+  </p:clrMapOvr>
+</p:sld>
+</file>
+
+<file path=ppt/slides/slide12.xml><?xml version="1.0" encoding="utf-8"?>
+<p:sld xmlns:a="http://schemas.openxmlformats.org/drawingml/2006/main" xmlns:r="http://schemas.openxmlformats.org/officeDocument/2006/relationships" xmlns:p="http://schemas.openxmlformats.org/presentationml/2006/main">
+  <p:cSld name="Slide 12">
+    <p:bg>
+      <p:bgPr>
+        <a:blipFill dpi="0" rotWithShape="1">
+          <a:blip r:embed="rId1">
+            <a:lum/>
+          </a:blip>
+          <a:srcRect/>
+          <a:stretch>
+            <a:fillRect/>
+          </a:stretch>
+        </a:blipFill>
+        <a:effectLst/>
+      </p:bgPr>
+    </p:bg>
+    <p:spTree>
+      <p:nvGrpSpPr>
+        <p:cNvPr id="1" name=""/>
+        <p:cNvGrpSpPr/>
+        <p:nvPr/>
+      </p:nvGrpSpPr>
+      <p:grpSpPr>
+        <a:xfrm>
+          <a:off x="0" y="0"/>
+          <a:ext cx="0" cy="0"/>
+          <a:chOff x="0" y="0"/>
+          <a:chExt cx="0" cy="0"/>
+        </a:xfrm>
+      </p:grpSpPr>
+      <p:sp>
+        <p:nvSpPr>
+          <p:cNvPr id="2" name="Text 0"/>
+          <p:cNvSpPr/>
+          <p:nvPr/>
+        </p:nvSpPr>
+        <p:spPr>
+          <a:xfrm>
+            <a:off x="548640" y="310896"/>
+            <a:ext cx="8229600" cy="274320"/>
+          </a:xfrm>
+          <a:prstGeom prst="rect">
+            <a:avLst/>
+          </a:prstGeom>
+          <a:noFill/>
+          <a:ln/>
+        </p:spPr>
+        <p:txBody>
+          <a:bodyPr wrap="square" lIns="0" tIns="0" rIns="0" bIns="0" rtlCol="0" anchor="ctr"/>
+          <a:lstStyle/>
+          <a:p>
+            <a:pPr indent="0" marL="0">
+              <a:buNone/>
+            </a:pPr>
+            <a:r>
+              <a:rPr lang="en-US" sz="1100" b="1" spc="300" kern="0" dirty="0">
+                <a:solidFill>
+                  <a:srgbClr val="C9A35A"/>
+                </a:solidFill>
+              </a:rPr>
               <a:t>ROLES &amp; NEXT STEPS</a:t>
             </a:r>
             <a:endParaRPr lang="en-US" sz="1100" dirty="0"/>

--- a/docs/slides/系統方案規劃.pptx
+++ b/docs/slides/系統方案規劃.pptx
@@ -13501,7 +13501,7 @@
                 <a:ea typeface="Microsoft JhengHei" pitchFamily="34" charset="-122"/>
                 <a:cs typeface="Microsoft JhengHei" pitchFamily="34" charset="-120"/>
               </a:rPr>
-              <a:t>※ Phase 0 以軟體開發為優先、幾乎零硬體投入；Phase 1 起硬體隨建案工程分批進場 —— 避免一次性重投資。</a:t>
+              <a:t>※ Phase 0 以軟體開發為優先，硬體僅需樣品屋最小組（櫃檯平板＋智慧音箱）；Phase 1 起隨建案工程分批進場 —— 避免一次性重投資。</a:t>
             </a:r>
             <a:endParaRPr lang="en-US" sz="1000" dirty="0"/>
           </a:p>
